--- a/slides/L2O.pptx
+++ b/slides/L2O.pptx
@@ -5,10 +5,10 @@
     <p:sldMasterId id="2147483952" r:id="rId4"/>
   </p:sldMasterIdLst>
   <p:notesMasterIdLst>
-    <p:notesMasterId r:id="rId17"/>
+    <p:notesMasterId r:id="rId18"/>
   </p:notesMasterIdLst>
   <p:handoutMasterIdLst>
-    <p:handoutMasterId r:id="rId18"/>
+    <p:handoutMasterId r:id="rId19"/>
   </p:handoutMasterIdLst>
   <p:sldIdLst>
     <p:sldId id="1659" r:id="rId5"/>
@@ -22,7 +22,8 @@
     <p:sldId id="1665" r:id="rId13"/>
     <p:sldId id="1673" r:id="rId14"/>
     <p:sldId id="1670" r:id="rId15"/>
-    <p:sldId id="1587" r:id="rId16"/>
+    <p:sldId id="1674" r:id="rId16"/>
+    <p:sldId id="1587" r:id="rId17"/>
   </p:sldIdLst>
   <p:sldSz cx="9144000" cy="5143500" type="screen16x9"/>
   <p:notesSz cx="6858000" cy="9144000"/>
@@ -166,9 +167,905 @@
 <file path=ppt/revisionInfo.xml><?xml version="1.0" encoding="utf-8"?>
 <p1510:revInfo xmlns:a="http://schemas.openxmlformats.org/drawingml/2006/main" xmlns:r="http://schemas.openxmlformats.org/officeDocument/2006/relationships" xmlns:p1510="http://schemas.microsoft.com/office/powerpoint/2015/10/main">
   <p1510:revLst>
-    <p1510:client id="{0AC39D99-9EFA-48FC-B579-ED5EAD3D674D}" v="50" dt="2026-06-16T22:24:42.852"/>
+    <p1510:client id="{381ADC10-7FC4-4E2B-8016-0E40486D5ACE}" v="51" dt="2026-06-12T20:25:46.350"/>
+    <p1510:client id="{639CEFE1-EC7A-446D-9E78-1AEADC4C61F0}" v="2" dt="2026-06-14T12:39:59.589"/>
+    <p1510:client id="{691735D0-ED1A-414C-9C4A-C9A78CFB774E}" v="2" dt="2026-06-14T18:28:20.179"/>
   </p1510:revLst>
 </p1510:revInfo>
+</file>
+
+<file path=ppt/changesInfos/changesInfo1.xml><?xml version="1.0" encoding="utf-8"?>
+<pc:chgInfo xmlns:a="http://schemas.openxmlformats.org/drawingml/2006/main" xmlns:r="http://schemas.openxmlformats.org/officeDocument/2006/relationships" xmlns:ac="http://schemas.microsoft.com/office/drawing/2013/main/command" xmlns:pc="http://schemas.microsoft.com/office/powerpoint/2013/main/command">
+  <pc:docChgLst>
+    <pc:chgData name="Jan Drgona" userId="sNIp1ysM4YJF8rq7AjHFQUvjJxoOV3ALD8EG3g/9Af8=" providerId="None" clId="Web-{DB9AA438-0223-4E46-85CD-8243199D156B}"/>
+    <pc:docChg chg="addSld delSld modSld sldOrd">
+      <pc:chgData name="Jan Drgona" userId="sNIp1ysM4YJF8rq7AjHFQUvjJxoOV3ALD8EG3g/9Af8=" providerId="None" clId="Web-{DB9AA438-0223-4E46-85CD-8243199D156B}" dt="2026-06-12T17:43:35.162" v="200"/>
+      <pc:docMkLst>
+        <pc:docMk/>
+      </pc:docMkLst>
+      <pc:sldChg chg="mod modShow">
+        <pc:chgData name="Jan Drgona" userId="sNIp1ysM4YJF8rq7AjHFQUvjJxoOV3ALD8EG3g/9Af8=" providerId="None" clId="Web-{DB9AA438-0223-4E46-85CD-8243199D156B}" dt="2026-06-12T17:43:35.162" v="200"/>
+        <pc:sldMkLst>
+          <pc:docMk/>
+          <pc:sldMk cId="842848323" sldId="1730"/>
+        </pc:sldMkLst>
+      </pc:sldChg>
+      <pc:sldChg chg="ord">
+        <pc:chgData name="Jan Drgona" userId="sNIp1ysM4YJF8rq7AjHFQUvjJxoOV3ALD8EG3g/9Af8=" providerId="None" clId="Web-{DB9AA438-0223-4E46-85CD-8243199D156B}" dt="2026-06-12T16:46:08.493" v="52"/>
+        <pc:sldMkLst>
+          <pc:docMk/>
+          <pc:sldMk cId="476048563" sldId="1732"/>
+        </pc:sldMkLst>
+      </pc:sldChg>
+      <pc:sldChg chg="addSp delSp modSp add replId">
+        <pc:chgData name="Jan Drgona" userId="sNIp1ysM4YJF8rq7AjHFQUvjJxoOV3ALD8EG3g/9Af8=" providerId="None" clId="Web-{DB9AA438-0223-4E46-85CD-8243199D156B}" dt="2026-06-12T17:18:51.472" v="183" actId="1076"/>
+        <pc:sldMkLst>
+          <pc:docMk/>
+          <pc:sldMk cId="690392975" sldId="1736"/>
+        </pc:sldMkLst>
+        <pc:spChg chg="mod">
+          <ac:chgData name="Jan Drgona" userId="sNIp1ysM4YJF8rq7AjHFQUvjJxoOV3ALD8EG3g/9Af8=" providerId="None" clId="Web-{DB9AA438-0223-4E46-85CD-8243199D156B}" dt="2026-06-12T17:13:11.425" v="166" actId="20577"/>
+          <ac:spMkLst>
+            <pc:docMk/>
+            <pc:sldMk cId="690392975" sldId="1736"/>
+            <ac:spMk id="3" creationId="{95B7F4E0-E563-70E5-1170-94CFD4AF1E93}"/>
+          </ac:spMkLst>
+        </pc:spChg>
+        <pc:picChg chg="add mod ord">
+          <ac:chgData name="Jan Drgona" userId="sNIp1ysM4YJF8rq7AjHFQUvjJxoOV3ALD8EG3g/9Af8=" providerId="None" clId="Web-{DB9AA438-0223-4E46-85CD-8243199D156B}" dt="2026-06-12T17:18:51.472" v="183" actId="1076"/>
+          <ac:picMkLst>
+            <pc:docMk/>
+            <pc:sldMk cId="690392975" sldId="1736"/>
+            <ac:picMk id="34" creationId="{AC891504-9010-7A8F-7E55-005832F7AF29}"/>
+          </ac:picMkLst>
+        </pc:picChg>
+        <pc:inkChg chg="add">
+          <ac:chgData name="Jan Drgona" userId="sNIp1ysM4YJF8rq7AjHFQUvjJxoOV3ALD8EG3g/9Af8=" providerId="None" clId="Web-{DB9AA438-0223-4E46-85CD-8243199D156B}" dt="2026-06-12T16:51:09.663" v="95"/>
+          <ac:inkMkLst>
+            <pc:docMk/>
+            <pc:sldMk cId="690392975" sldId="1736"/>
+            <ac:inkMk id="16" creationId="{1CCCE17F-B782-B822-AECA-F4AA99BAC6C5}"/>
+          </ac:inkMkLst>
+        </pc:inkChg>
+        <pc:inkChg chg="add">
+          <ac:chgData name="Jan Drgona" userId="sNIp1ysM4YJF8rq7AjHFQUvjJxoOV3ALD8EG3g/9Af8=" providerId="None" clId="Web-{DB9AA438-0223-4E46-85CD-8243199D156B}" dt="2026-06-12T16:51:13.054" v="96"/>
+          <ac:inkMkLst>
+            <pc:docMk/>
+            <pc:sldMk cId="690392975" sldId="1736"/>
+            <ac:inkMk id="17" creationId="{79944F0F-769B-0C1F-7691-18DF3DE6D5E9}"/>
+          </ac:inkMkLst>
+        </pc:inkChg>
+        <pc:inkChg chg="add">
+          <ac:chgData name="Jan Drgona" userId="sNIp1ysM4YJF8rq7AjHFQUvjJxoOV3ALD8EG3g/9Af8=" providerId="None" clId="Web-{DB9AA438-0223-4E46-85CD-8243199D156B}" dt="2026-06-12T16:51:25.257" v="97"/>
+          <ac:inkMkLst>
+            <pc:docMk/>
+            <pc:sldMk cId="690392975" sldId="1736"/>
+            <ac:inkMk id="18" creationId="{01359987-5035-9FAA-518C-EEFA1D7FB704}"/>
+          </ac:inkMkLst>
+        </pc:inkChg>
+        <pc:inkChg chg="add">
+          <ac:chgData name="Jan Drgona" userId="sNIp1ysM4YJF8rq7AjHFQUvjJxoOV3ALD8EG3g/9Af8=" providerId="None" clId="Web-{DB9AA438-0223-4E46-85CD-8243199D156B}" dt="2026-06-12T16:51:44.477" v="104"/>
+          <ac:inkMkLst>
+            <pc:docMk/>
+            <pc:sldMk cId="690392975" sldId="1736"/>
+            <ac:inkMk id="22" creationId="{468C8D38-554A-275E-C62A-A6597299D7C6}"/>
+          </ac:inkMkLst>
+        </pc:inkChg>
+        <pc:inkChg chg="add">
+          <ac:chgData name="Jan Drgona" userId="sNIp1ysM4YJF8rq7AjHFQUvjJxoOV3ALD8EG3g/9Af8=" providerId="None" clId="Web-{DB9AA438-0223-4E46-85CD-8243199D156B}" dt="2026-06-12T16:51:48.196" v="105"/>
+          <ac:inkMkLst>
+            <pc:docMk/>
+            <pc:sldMk cId="690392975" sldId="1736"/>
+            <ac:inkMk id="23" creationId="{C1F27766-1077-445C-DCFC-71DF31CA7D65}"/>
+          </ac:inkMkLst>
+        </pc:inkChg>
+        <pc:inkChg chg="add">
+          <ac:chgData name="Jan Drgona" userId="sNIp1ysM4YJF8rq7AjHFQUvjJxoOV3ALD8EG3g/9Af8=" providerId="None" clId="Web-{DB9AA438-0223-4E46-85CD-8243199D156B}" dt="2026-06-12T16:51:51.040" v="106"/>
+          <ac:inkMkLst>
+            <pc:docMk/>
+            <pc:sldMk cId="690392975" sldId="1736"/>
+            <ac:inkMk id="24" creationId="{A611D9A3-696E-A1B5-C232-87B31231D2F1}"/>
+          </ac:inkMkLst>
+        </pc:inkChg>
+        <pc:inkChg chg="add">
+          <ac:chgData name="Jan Drgona" userId="sNIp1ysM4YJF8rq7AjHFQUvjJxoOV3ALD8EG3g/9Af8=" providerId="None" clId="Web-{DB9AA438-0223-4E46-85CD-8243199D156B}" dt="2026-06-12T16:51:56.337" v="107"/>
+          <ac:inkMkLst>
+            <pc:docMk/>
+            <pc:sldMk cId="690392975" sldId="1736"/>
+            <ac:inkMk id="25" creationId="{6C1F9EC9-A69D-C7A8-B336-2D2038684503}"/>
+          </ac:inkMkLst>
+        </pc:inkChg>
+        <pc:inkChg chg="add">
+          <ac:chgData name="Jan Drgona" userId="sNIp1ysM4YJF8rq7AjHFQUvjJxoOV3ALD8EG3g/9Af8=" providerId="None" clId="Web-{DB9AA438-0223-4E46-85CD-8243199D156B}" dt="2026-06-12T16:52:06.306" v="108"/>
+          <ac:inkMkLst>
+            <pc:docMk/>
+            <pc:sldMk cId="690392975" sldId="1736"/>
+            <ac:inkMk id="26" creationId="{56EBC287-7BA8-780B-B56F-5534CED557B1}"/>
+          </ac:inkMkLst>
+        </pc:inkChg>
+        <pc:inkChg chg="add">
+          <ac:chgData name="Jan Drgona" userId="sNIp1ysM4YJF8rq7AjHFQUvjJxoOV3ALD8EG3g/9Af8=" providerId="None" clId="Web-{DB9AA438-0223-4E46-85CD-8243199D156B}" dt="2026-06-12T16:52:23.885" v="109"/>
+          <ac:inkMkLst>
+            <pc:docMk/>
+            <pc:sldMk cId="690392975" sldId="1736"/>
+            <ac:inkMk id="27" creationId="{E935F62D-23CA-0CA7-E947-FBEAB099126E}"/>
+          </ac:inkMkLst>
+        </pc:inkChg>
+        <pc:inkChg chg="add">
+          <ac:chgData name="Jan Drgona" userId="sNIp1ysM4YJF8rq7AjHFQUvjJxoOV3ALD8EG3g/9Af8=" providerId="None" clId="Web-{DB9AA438-0223-4E46-85CD-8243199D156B}" dt="2026-06-12T16:52:25.479" v="110"/>
+          <ac:inkMkLst>
+            <pc:docMk/>
+            <pc:sldMk cId="690392975" sldId="1736"/>
+            <ac:inkMk id="28" creationId="{065ABDD7-02D3-75EA-FC49-0AE50B0BD61B}"/>
+          </ac:inkMkLst>
+        </pc:inkChg>
+        <pc:inkChg chg="add">
+          <ac:chgData name="Jan Drgona" userId="sNIp1ysM4YJF8rq7AjHFQUvjJxoOV3ALD8EG3g/9Af8=" providerId="None" clId="Web-{DB9AA438-0223-4E46-85CD-8243199D156B}" dt="2026-06-12T16:52:26.588" v="111"/>
+          <ac:inkMkLst>
+            <pc:docMk/>
+            <pc:sldMk cId="690392975" sldId="1736"/>
+            <ac:inkMk id="29" creationId="{2AE9A8A8-272C-112B-5989-4289AB9FA758}"/>
+          </ac:inkMkLst>
+        </pc:inkChg>
+        <pc:inkChg chg="add">
+          <ac:chgData name="Jan Drgona" userId="sNIp1ysM4YJF8rq7AjHFQUvjJxoOV3ALD8EG3g/9Af8=" providerId="None" clId="Web-{DB9AA438-0223-4E46-85CD-8243199D156B}" dt="2026-06-12T16:52:28.292" v="112"/>
+          <ac:inkMkLst>
+            <pc:docMk/>
+            <pc:sldMk cId="690392975" sldId="1736"/>
+            <ac:inkMk id="30" creationId="{B522E27A-0419-18FB-4B45-97FCC2E45843}"/>
+          </ac:inkMkLst>
+        </pc:inkChg>
+        <pc:inkChg chg="add">
+          <ac:chgData name="Jan Drgona" userId="sNIp1ysM4YJF8rq7AjHFQUvjJxoOV3ALD8EG3g/9Af8=" providerId="None" clId="Web-{DB9AA438-0223-4E46-85CD-8243199D156B}" dt="2026-06-12T16:52:30.526" v="113"/>
+          <ac:inkMkLst>
+            <pc:docMk/>
+            <pc:sldMk cId="690392975" sldId="1736"/>
+            <ac:inkMk id="31" creationId="{C99B6816-0AC0-DF21-F6C2-47A000276BF5}"/>
+          </ac:inkMkLst>
+        </pc:inkChg>
+        <pc:inkChg chg="add">
+          <ac:chgData name="Jan Drgona" userId="sNIp1ysM4YJF8rq7AjHFQUvjJxoOV3ALD8EG3g/9Af8=" providerId="None" clId="Web-{DB9AA438-0223-4E46-85CD-8243199D156B}" dt="2026-06-12T16:52:34.870" v="114"/>
+          <ac:inkMkLst>
+            <pc:docMk/>
+            <pc:sldMk cId="690392975" sldId="1736"/>
+            <ac:inkMk id="32" creationId="{130869F1-A928-6FF7-FA48-6EE6FC86C22E}"/>
+          </ac:inkMkLst>
+        </pc:inkChg>
+      </pc:sldChg>
+      <pc:sldChg chg="addSp delSp modSp add replId">
+        <pc:chgData name="Jan Drgona" userId="sNIp1ysM4YJF8rq7AjHFQUvjJxoOV3ALD8EG3g/9Af8=" providerId="None" clId="Web-{DB9AA438-0223-4E46-85CD-8243199D156B}" dt="2026-06-12T17:19:15.457" v="188"/>
+        <pc:sldMkLst>
+          <pc:docMk/>
+          <pc:sldMk cId="3613777873" sldId="1737"/>
+        </pc:sldMkLst>
+        <pc:spChg chg="mod">
+          <ac:chgData name="Jan Drgona" userId="sNIp1ysM4YJF8rq7AjHFQUvjJxoOV3ALD8EG3g/9Af8=" providerId="None" clId="Web-{DB9AA438-0223-4E46-85CD-8243199D156B}" dt="2026-06-12T17:13:17.394" v="168" actId="20577"/>
+          <ac:spMkLst>
+            <pc:docMk/>
+            <pc:sldMk cId="3613777873" sldId="1737"/>
+            <ac:spMk id="3" creationId="{808B0F5F-0954-1F4B-4F2D-77C9B09BF0D4}"/>
+          </ac:spMkLst>
+        </pc:spChg>
+        <pc:picChg chg="add ord">
+          <ac:chgData name="Jan Drgona" userId="sNIp1ysM4YJF8rq7AjHFQUvjJxoOV3ALD8EG3g/9Af8=" providerId="None" clId="Web-{DB9AA438-0223-4E46-85CD-8243199D156B}" dt="2026-06-12T17:19:15.457" v="188"/>
+          <ac:picMkLst>
+            <pc:docMk/>
+            <pc:sldMk cId="3613777873" sldId="1737"/>
+            <ac:picMk id="15" creationId="{620CB6B2-0C27-ED4F-FE06-4F9FD67DC667}"/>
+          </ac:picMkLst>
+        </pc:picChg>
+        <pc:inkChg chg="add">
+          <ac:chgData name="Jan Drgona" userId="sNIp1ysM4YJF8rq7AjHFQUvjJxoOV3ALD8EG3g/9Af8=" providerId="None" clId="Web-{DB9AA438-0223-4E46-85CD-8243199D156B}" dt="2026-06-12T16:53:00.309" v="117"/>
+          <ac:inkMkLst>
+            <pc:docMk/>
+            <pc:sldMk cId="3613777873" sldId="1737"/>
+            <ac:inkMk id="5" creationId="{37B0E478-3A65-84A3-11F7-33FC162FB79C}"/>
+          </ac:inkMkLst>
+        </pc:inkChg>
+        <pc:inkChg chg="add">
+          <ac:chgData name="Jan Drgona" userId="sNIp1ysM4YJF8rq7AjHFQUvjJxoOV3ALD8EG3g/9Af8=" providerId="None" clId="Web-{DB9AA438-0223-4E46-85CD-8243199D156B}" dt="2026-06-12T16:53:01.715" v="118"/>
+          <ac:inkMkLst>
+            <pc:docMk/>
+            <pc:sldMk cId="3613777873" sldId="1737"/>
+            <ac:inkMk id="6" creationId="{577B67A4-6476-2E03-98D6-36C521654584}"/>
+          </ac:inkMkLst>
+        </pc:inkChg>
+        <pc:inkChg chg="add">
+          <ac:chgData name="Jan Drgona" userId="sNIp1ysM4YJF8rq7AjHFQUvjJxoOV3ALD8EG3g/9Af8=" providerId="None" clId="Web-{DB9AA438-0223-4E46-85CD-8243199D156B}" dt="2026-06-12T16:53:06.278" v="119"/>
+          <ac:inkMkLst>
+            <pc:docMk/>
+            <pc:sldMk cId="3613777873" sldId="1737"/>
+            <ac:inkMk id="8" creationId="{25B74D93-19C1-F0FC-3991-CF35A2D0518B}"/>
+          </ac:inkMkLst>
+        </pc:inkChg>
+        <pc:inkChg chg="add">
+          <ac:chgData name="Jan Drgona" userId="sNIp1ysM4YJF8rq7AjHFQUvjJxoOV3ALD8EG3g/9Af8=" providerId="None" clId="Web-{DB9AA438-0223-4E46-85CD-8243199D156B}" dt="2026-06-12T16:53:25.716" v="120"/>
+          <ac:inkMkLst>
+            <pc:docMk/>
+            <pc:sldMk cId="3613777873" sldId="1737"/>
+            <ac:inkMk id="10" creationId="{521AF845-2368-8D09-777F-42BC49C4F2EA}"/>
+          </ac:inkMkLst>
+        </pc:inkChg>
+        <pc:inkChg chg="add">
+          <ac:chgData name="Jan Drgona" userId="sNIp1ysM4YJF8rq7AjHFQUvjJxoOV3ALD8EG3g/9Af8=" providerId="None" clId="Web-{DB9AA438-0223-4E46-85CD-8243199D156B}" dt="2026-06-12T16:53:28.435" v="121"/>
+          <ac:inkMkLst>
+            <pc:docMk/>
+            <pc:sldMk cId="3613777873" sldId="1737"/>
+            <ac:inkMk id="11" creationId="{0A56CA5B-15F3-4541-D467-04E977319BA0}"/>
+          </ac:inkMkLst>
+        </pc:inkChg>
+        <pc:inkChg chg="add">
+          <ac:chgData name="Jan Drgona" userId="sNIp1ysM4YJF8rq7AjHFQUvjJxoOV3ALD8EG3g/9Af8=" providerId="None" clId="Web-{DB9AA438-0223-4E46-85CD-8243199D156B}" dt="2026-06-12T16:53:29.810" v="122"/>
+          <ac:inkMkLst>
+            <pc:docMk/>
+            <pc:sldMk cId="3613777873" sldId="1737"/>
+            <ac:inkMk id="12" creationId="{12B787D3-FB9C-39C4-DEF8-89A202DCE41A}"/>
+          </ac:inkMkLst>
+        </pc:inkChg>
+        <pc:inkChg chg="add">
+          <ac:chgData name="Jan Drgona" userId="sNIp1ysM4YJF8rq7AjHFQUvjJxoOV3ALD8EG3g/9Af8=" providerId="None" clId="Web-{DB9AA438-0223-4E46-85CD-8243199D156B}" dt="2026-06-12T16:53:40.263" v="123"/>
+          <ac:inkMkLst>
+            <pc:docMk/>
+            <pc:sldMk cId="3613777873" sldId="1737"/>
+            <ac:inkMk id="13" creationId="{0D41EC7F-7216-47AE-E225-E97AFBCF5E2A}"/>
+          </ac:inkMkLst>
+        </pc:inkChg>
+      </pc:sldChg>
+      <pc:sldChg chg="addSp delSp modSp add replId">
+        <pc:chgData name="Jan Drgona" userId="sNIp1ysM4YJF8rq7AjHFQUvjJxoOV3ALD8EG3g/9Af8=" providerId="None" clId="Web-{DB9AA438-0223-4E46-85CD-8243199D156B}" dt="2026-06-12T17:19:26.895" v="191"/>
+        <pc:sldMkLst>
+          <pc:docMk/>
+          <pc:sldMk cId="3725718816" sldId="1738"/>
+        </pc:sldMkLst>
+        <pc:spChg chg="mod">
+          <ac:chgData name="Jan Drgona" userId="sNIp1ysM4YJF8rq7AjHFQUvjJxoOV3ALD8EG3g/9Af8=" providerId="None" clId="Web-{DB9AA438-0223-4E46-85CD-8243199D156B}" dt="2026-06-12T17:13:21.691" v="170" actId="20577"/>
+          <ac:spMkLst>
+            <pc:docMk/>
+            <pc:sldMk cId="3725718816" sldId="1738"/>
+            <ac:spMk id="3" creationId="{26DC76AE-6575-35FD-DBB6-529A3AB8BB25}"/>
+          </ac:spMkLst>
+        </pc:spChg>
+        <pc:picChg chg="add ord">
+          <ac:chgData name="Jan Drgona" userId="sNIp1ysM4YJF8rq7AjHFQUvjJxoOV3ALD8EG3g/9Af8=" providerId="None" clId="Web-{DB9AA438-0223-4E46-85CD-8243199D156B}" dt="2026-06-12T17:19:26.895" v="191"/>
+          <ac:picMkLst>
+            <pc:docMk/>
+            <pc:sldMk cId="3725718816" sldId="1738"/>
+            <ac:picMk id="14" creationId="{3B49F548-4B67-5844-ADD8-573CE2A796D8}"/>
+          </ac:picMkLst>
+        </pc:picChg>
+        <pc:inkChg chg="add">
+          <ac:chgData name="Jan Drgona" userId="sNIp1ysM4YJF8rq7AjHFQUvjJxoOV3ALD8EG3g/9Af8=" providerId="None" clId="Web-{DB9AA438-0223-4E46-85CD-8243199D156B}" dt="2026-06-12T16:54:54.407" v="131"/>
+          <ac:inkMkLst>
+            <pc:docMk/>
+            <pc:sldMk cId="3725718816" sldId="1738"/>
+            <ac:inkMk id="8" creationId="{E7A0C1E4-6318-AAC6-D195-8A34AD8806AA}"/>
+          </ac:inkMkLst>
+        </pc:inkChg>
+        <pc:inkChg chg="add">
+          <ac:chgData name="Jan Drgona" userId="sNIp1ysM4YJF8rq7AjHFQUvjJxoOV3ALD8EG3g/9Af8=" providerId="None" clId="Web-{DB9AA438-0223-4E46-85CD-8243199D156B}" dt="2026-06-12T16:55:15.815" v="132"/>
+          <ac:inkMkLst>
+            <pc:docMk/>
+            <pc:sldMk cId="3725718816" sldId="1738"/>
+            <ac:inkMk id="10" creationId="{95612952-7224-43B1-573E-B21F862D4930}"/>
+          </ac:inkMkLst>
+        </pc:inkChg>
+        <pc:inkChg chg="add">
+          <ac:chgData name="Jan Drgona" userId="sNIp1ysM4YJF8rq7AjHFQUvjJxoOV3ALD8EG3g/9Af8=" providerId="None" clId="Web-{DB9AA438-0223-4E46-85CD-8243199D156B}" dt="2026-06-12T16:55:26.878" v="133"/>
+          <ac:inkMkLst>
+            <pc:docMk/>
+            <pc:sldMk cId="3725718816" sldId="1738"/>
+            <ac:inkMk id="11" creationId="{7B95969B-FE59-752D-FCD3-7566F1CEB66E}"/>
+          </ac:inkMkLst>
+        </pc:inkChg>
+        <pc:inkChg chg="add">
+          <ac:chgData name="Jan Drgona" userId="sNIp1ysM4YJF8rq7AjHFQUvjJxoOV3ALD8EG3g/9Af8=" providerId="None" clId="Web-{DB9AA438-0223-4E46-85CD-8243199D156B}" dt="2026-06-12T16:55:30.893" v="134"/>
+          <ac:inkMkLst>
+            <pc:docMk/>
+            <pc:sldMk cId="3725718816" sldId="1738"/>
+            <ac:inkMk id="12" creationId="{DE4D6C11-0DD1-8736-4F21-E3EA9E7E7DE3}"/>
+          </ac:inkMkLst>
+        </pc:inkChg>
+      </pc:sldChg>
+      <pc:sldChg chg="addSp delSp modSp add replId">
+        <pc:chgData name="Jan Drgona" userId="sNIp1ysM4YJF8rq7AjHFQUvjJxoOV3ALD8EG3g/9Af8=" providerId="None" clId="Web-{DB9AA438-0223-4E46-85CD-8243199D156B}" dt="2026-06-12T17:19:34.536" v="194"/>
+        <pc:sldMkLst>
+          <pc:docMk/>
+          <pc:sldMk cId="1947342043" sldId="1739"/>
+        </pc:sldMkLst>
+        <pc:spChg chg="mod">
+          <ac:chgData name="Jan Drgona" userId="sNIp1ysM4YJF8rq7AjHFQUvjJxoOV3ALD8EG3g/9Af8=" providerId="None" clId="Web-{DB9AA438-0223-4E46-85CD-8243199D156B}" dt="2026-06-12T17:13:26.082" v="172" actId="20577"/>
+          <ac:spMkLst>
+            <pc:docMk/>
+            <pc:sldMk cId="1947342043" sldId="1739"/>
+            <ac:spMk id="3" creationId="{1D2718EF-5D3D-0482-7327-8EF9F0AA074B}"/>
+          </ac:spMkLst>
+        </pc:spChg>
+        <pc:picChg chg="add ord">
+          <ac:chgData name="Jan Drgona" userId="sNIp1ysM4YJF8rq7AjHFQUvjJxoOV3ALD8EG3g/9Af8=" providerId="None" clId="Web-{DB9AA438-0223-4E46-85CD-8243199D156B}" dt="2026-06-12T17:19:34.536" v="194"/>
+          <ac:picMkLst>
+            <pc:docMk/>
+            <pc:sldMk cId="1947342043" sldId="1739"/>
+            <ac:picMk id="8" creationId="{6E878247-7844-D47F-166E-DF6D8822901A}"/>
+          </ac:picMkLst>
+        </pc:picChg>
+        <pc:inkChg chg="add">
+          <ac:chgData name="Jan Drgona" userId="sNIp1ysM4YJF8rq7AjHFQUvjJxoOV3ALD8EG3g/9Af8=" providerId="None" clId="Web-{DB9AA438-0223-4E46-85CD-8243199D156B}" dt="2026-06-12T16:56:08.692" v="136"/>
+          <ac:inkMkLst>
+            <pc:docMk/>
+            <pc:sldMk cId="1947342043" sldId="1739"/>
+            <ac:inkMk id="4" creationId="{F894445B-78C5-AAD8-A501-DDFF8ACBA7E1}"/>
+          </ac:inkMkLst>
+        </pc:inkChg>
+        <pc:inkChg chg="add">
+          <ac:chgData name="Jan Drgona" userId="sNIp1ysM4YJF8rq7AjHFQUvjJxoOV3ALD8EG3g/9Af8=" providerId="None" clId="Web-{DB9AA438-0223-4E46-85CD-8243199D156B}" dt="2026-06-12T16:56:26.693" v="137"/>
+          <ac:inkMkLst>
+            <pc:docMk/>
+            <pc:sldMk cId="1947342043" sldId="1739"/>
+            <ac:inkMk id="5" creationId="{F99777EB-1F42-D6E7-1ECF-DAB11B950524}"/>
+          </ac:inkMkLst>
+        </pc:inkChg>
+      </pc:sldChg>
+      <pc:sldChg chg="addSp delSp modSp add replId">
+        <pc:chgData name="Jan Drgona" userId="sNIp1ysM4YJF8rq7AjHFQUvjJxoOV3ALD8EG3g/9Af8=" providerId="None" clId="Web-{DB9AA438-0223-4E46-85CD-8243199D156B}" dt="2026-06-12T17:42:32.533" v="198" actId="1076"/>
+        <pc:sldMkLst>
+          <pc:docMk/>
+          <pc:sldMk cId="3915458495" sldId="1740"/>
+        </pc:sldMkLst>
+        <pc:picChg chg="add mod">
+          <ac:chgData name="Jan Drgona" userId="sNIp1ysM4YJF8rq7AjHFQUvjJxoOV3ALD8EG3g/9Af8=" providerId="None" clId="Web-{DB9AA438-0223-4E46-85CD-8243199D156B}" dt="2026-06-12T17:42:32.533" v="198" actId="1076"/>
+          <ac:picMkLst>
+            <pc:docMk/>
+            <pc:sldMk cId="3915458495" sldId="1740"/>
+            <ac:picMk id="4" creationId="{40AAC8AB-DFF9-6509-8035-A9FBF4412CC0}"/>
+          </ac:picMkLst>
+        </pc:picChg>
+      </pc:sldChg>
+      <pc:sldChg chg="addSp delSp add replId">
+        <pc:chgData name="Jan Drgona" userId="sNIp1ysM4YJF8rq7AjHFQUvjJxoOV3ALD8EG3g/9Af8=" providerId="None" clId="Web-{DB9AA438-0223-4E46-85CD-8243199D156B}" dt="2026-06-12T17:19:00.284" v="185"/>
+        <pc:sldMkLst>
+          <pc:docMk/>
+          <pc:sldMk cId="4258409942" sldId="1741"/>
+        </pc:sldMkLst>
+        <pc:picChg chg="add">
+          <ac:chgData name="Jan Drgona" userId="sNIp1ysM4YJF8rq7AjHFQUvjJxoOV3ALD8EG3g/9Af8=" providerId="None" clId="Web-{DB9AA438-0223-4E46-85CD-8243199D156B}" dt="2026-06-12T17:19:00.284" v="185"/>
+          <ac:picMkLst>
+            <pc:docMk/>
+            <pc:sldMk cId="4258409942" sldId="1741"/>
+            <ac:picMk id="5" creationId="{D9672737-70FA-EB30-41E4-E93B48347033}"/>
+          </ac:picMkLst>
+        </pc:picChg>
+      </pc:sldChg>
+    </pc:docChg>
+  </pc:docChgLst>
+  <pc:docChgLst>
+    <pc:chgData name="Jan Drgona" userId="sNIp1ysM4YJF8rq7AjHFQUvjJxoOV3ALD8EG3g/9Af8=" providerId="None" clId="Web-{381ADC10-7FC4-4E2B-8016-0E40486D5ACE}"/>
+    <pc:docChg chg="addSld delSld modSld sldOrd">
+      <pc:chgData name="Jan Drgona" userId="sNIp1ysM4YJF8rq7AjHFQUvjJxoOV3ALD8EG3g/9Af8=" providerId="None" clId="Web-{381ADC10-7FC4-4E2B-8016-0E40486D5ACE}" dt="2026-06-12T20:25:46.350" v="42"/>
+      <pc:docMkLst>
+        <pc:docMk/>
+      </pc:docMkLst>
+      <pc:sldChg chg="modSp">
+        <pc:chgData name="Jan Drgona" userId="sNIp1ysM4YJF8rq7AjHFQUvjJxoOV3ALD8EG3g/9Af8=" providerId="None" clId="Web-{381ADC10-7FC4-4E2B-8016-0E40486D5ACE}" dt="2026-06-12T20:01:52.874" v="5" actId="20577"/>
+        <pc:sldMkLst>
+          <pc:docMk/>
+          <pc:sldMk cId="0" sldId="258"/>
+        </pc:sldMkLst>
+        <pc:spChg chg="mod">
+          <ac:chgData name="Jan Drgona" userId="sNIp1ysM4YJF8rq7AjHFQUvjJxoOV3ALD8EG3g/9Af8=" providerId="None" clId="Web-{381ADC10-7FC4-4E2B-8016-0E40486D5ACE}" dt="2026-06-12T20:01:52.874" v="5" actId="20577"/>
+          <ac:spMkLst>
+            <pc:docMk/>
+            <pc:sldMk cId="0" sldId="258"/>
+            <ac:spMk id="98" creationId="{00000000-0000-0000-0000-000000000000}"/>
+          </ac:spMkLst>
+        </pc:spChg>
+      </pc:sldChg>
+      <pc:sldChg chg="mod modShow">
+        <pc:chgData name="Jan Drgona" userId="sNIp1ysM4YJF8rq7AjHFQUvjJxoOV3ALD8EG3g/9Af8=" providerId="None" clId="Web-{381ADC10-7FC4-4E2B-8016-0E40486D5ACE}" dt="2026-06-12T20:15:28.929" v="9"/>
+        <pc:sldMkLst>
+          <pc:docMk/>
+          <pc:sldMk cId="4023729905" sldId="1589"/>
+        </pc:sldMkLst>
+      </pc:sldChg>
+      <pc:sldChg chg="ord">
+        <pc:chgData name="Jan Drgona" userId="sNIp1ysM4YJF8rq7AjHFQUvjJxoOV3ALD8EG3g/9Af8=" providerId="None" clId="Web-{381ADC10-7FC4-4E2B-8016-0E40486D5ACE}" dt="2026-06-12T20:25:46.350" v="42"/>
+        <pc:sldMkLst>
+          <pc:docMk/>
+          <pc:sldMk cId="3821775337" sldId="1594"/>
+        </pc:sldMkLst>
+      </pc:sldChg>
+      <pc:sldChg chg="modSp">
+        <pc:chgData name="Jan Drgona" userId="sNIp1ysM4YJF8rq7AjHFQUvjJxoOV3ALD8EG3g/9Af8=" providerId="None" clId="Web-{381ADC10-7FC4-4E2B-8016-0E40486D5ACE}" dt="2026-06-12T20:16:36.619" v="13" actId="1076"/>
+        <pc:sldMkLst>
+          <pc:docMk/>
+          <pc:sldMk cId="2372954023" sldId="1608"/>
+        </pc:sldMkLst>
+        <pc:spChg chg="mod">
+          <ac:chgData name="Jan Drgona" userId="sNIp1ysM4YJF8rq7AjHFQUvjJxoOV3ALD8EG3g/9Af8=" providerId="None" clId="Web-{381ADC10-7FC4-4E2B-8016-0E40486D5ACE}" dt="2026-06-12T20:16:36.619" v="13" actId="1076"/>
+          <ac:spMkLst>
+            <pc:docMk/>
+            <pc:sldMk cId="2372954023" sldId="1608"/>
+            <ac:spMk id="16" creationId="{14BA69E7-6405-92DB-6DE2-EFCF58CAC29C}"/>
+          </ac:spMkLst>
+        </pc:spChg>
+      </pc:sldChg>
+      <pc:sldChg chg="mod modShow">
+        <pc:chgData name="Jan Drgona" userId="sNIp1ysM4YJF8rq7AjHFQUvjJxoOV3ALD8EG3g/9Af8=" providerId="None" clId="Web-{381ADC10-7FC4-4E2B-8016-0E40486D5ACE}" dt="2026-06-12T20:15:28.929" v="8"/>
+        <pc:sldMkLst>
+          <pc:docMk/>
+          <pc:sldMk cId="2356637565" sldId="1625"/>
+        </pc:sldMkLst>
+      </pc:sldChg>
+      <pc:sldChg chg="addSp delSp modSp">
+        <pc:chgData name="Jan Drgona" userId="sNIp1ysM4YJF8rq7AjHFQUvjJxoOV3ALD8EG3g/9Af8=" providerId="None" clId="Web-{381ADC10-7FC4-4E2B-8016-0E40486D5ACE}" dt="2026-06-12T20:16:53.932" v="20"/>
+        <pc:sldMkLst>
+          <pc:docMk/>
+          <pc:sldMk cId="3596885914" sldId="1629"/>
+        </pc:sldMkLst>
+        <pc:spChg chg="add mod">
+          <ac:chgData name="Jan Drgona" userId="sNIp1ysM4YJF8rq7AjHFQUvjJxoOV3ALD8EG3g/9Af8=" providerId="None" clId="Web-{381ADC10-7FC4-4E2B-8016-0E40486D5ACE}" dt="2026-06-12T20:16:53.932" v="20"/>
+          <ac:spMkLst>
+            <pc:docMk/>
+            <pc:sldMk cId="3596885914" sldId="1629"/>
+            <ac:spMk id="11" creationId="{ABD9D262-32FC-7775-1325-CC6A5FFDFB8D}"/>
+          </ac:spMkLst>
+        </pc:spChg>
+      </pc:sldChg>
+      <pc:sldChg chg="ord">
+        <pc:chgData name="Jan Drgona" userId="sNIp1ysM4YJF8rq7AjHFQUvjJxoOV3ALD8EG3g/9Af8=" providerId="None" clId="Web-{381ADC10-7FC4-4E2B-8016-0E40486D5ACE}" dt="2026-06-12T20:25:34.459" v="39"/>
+        <pc:sldMkLst>
+          <pc:docMk/>
+          <pc:sldMk cId="842848323" sldId="1730"/>
+        </pc:sldMkLst>
+      </pc:sldChg>
+      <pc:sldChg chg="ord">
+        <pc:chgData name="Jan Drgona" userId="sNIp1ysM4YJF8rq7AjHFQUvjJxoOV3ALD8EG3g/9Af8=" providerId="None" clId="Web-{381ADC10-7FC4-4E2B-8016-0E40486D5ACE}" dt="2026-06-12T20:22:10.894" v="37"/>
+        <pc:sldMkLst>
+          <pc:docMk/>
+          <pc:sldMk cId="3915458495" sldId="1740"/>
+        </pc:sldMkLst>
+      </pc:sldChg>
+    </pc:docChg>
+  </pc:docChgLst>
+  <pc:docChgLst>
+    <pc:chgData name="Truong Nghiem" userId="vBvvVE8C9ugQCln+04XOl7ubP+936WO3hfIf0AxT0gg=" providerId="None" clId="Web-{639CEFE1-EC7A-446D-9E78-1AEADC4C61F0}"/>
+    <pc:docChg chg="modSld">
+      <pc:chgData name="Truong Nghiem" userId="vBvvVE8C9ugQCln+04XOl7ubP+936WO3hfIf0AxT0gg=" providerId="None" clId="Web-{639CEFE1-EC7A-446D-9E78-1AEADC4C61F0}" dt="2026-06-14T12:39:58.933" v="0"/>
+      <pc:docMkLst>
+        <pc:docMk/>
+      </pc:docMkLst>
+      <pc:sldChg chg="modSp">
+        <pc:chgData name="Truong Nghiem" userId="vBvvVE8C9ugQCln+04XOl7ubP+936WO3hfIf0AxT0gg=" providerId="None" clId="Web-{639CEFE1-EC7A-446D-9E78-1AEADC4C61F0}" dt="2026-06-14T12:39:58.933" v="0"/>
+        <pc:sldMkLst>
+          <pc:docMk/>
+          <pc:sldMk cId="496440186" sldId="1728"/>
+        </pc:sldMkLst>
+        <pc:picChg chg="mod">
+          <ac:chgData name="Truong Nghiem" userId="vBvvVE8C9ugQCln+04XOl7ubP+936WO3hfIf0AxT0gg=" providerId="None" clId="Web-{639CEFE1-EC7A-446D-9E78-1AEADC4C61F0}" dt="2026-06-14T12:39:58.933" v="0"/>
+          <ac:picMkLst>
+            <pc:docMk/>
+            <pc:sldMk cId="496440186" sldId="1728"/>
+            <ac:picMk id="1034" creationId="{0BC5F26E-D245-6E8C-EB40-1D24863D5359}"/>
+          </ac:picMkLst>
+        </pc:picChg>
+      </pc:sldChg>
+    </pc:docChg>
+  </pc:docChgLst>
+  <pc:docChgLst>
+    <pc:chgData name="Truong Nghiem" userId="vBvvVE8C9ugQCln+04XOl7ubP+936WO3hfIf0AxT0gg=" providerId="None" clId="Web-{691735D0-ED1A-414C-9C4A-C9A78CFB774E}"/>
+    <pc:docChg chg="addSld delSld">
+      <pc:chgData name="Truong Nghiem" userId="vBvvVE8C9ugQCln+04XOl7ubP+936WO3hfIf0AxT0gg=" providerId="None" clId="Web-{691735D0-ED1A-414C-9C4A-C9A78CFB774E}" dt="2026-06-14T18:28:20.179" v="1"/>
+      <pc:docMkLst>
+        <pc:docMk/>
+      </pc:docMkLst>
+      <pc:sldChg chg="new del">
+        <pc:chgData name="Truong Nghiem" userId="vBvvVE8C9ugQCln+04XOl7ubP+936WO3hfIf0AxT0gg=" providerId="None" clId="Web-{691735D0-ED1A-414C-9C4A-C9A78CFB774E}" dt="2026-06-14T18:28:20.179" v="1"/>
+        <pc:sldMkLst>
+          <pc:docMk/>
+          <pc:sldMk cId="1436794479" sldId="1742"/>
+        </pc:sldMkLst>
+      </pc:sldChg>
+    </pc:docChg>
+  </pc:docChgLst>
+  <pc:docChgLst>
+    <pc:chgData name="Thomas Beckers" userId="c12k/5uIRDOZYDGGnB12/aGD+4Q6PB85erRsVU18rvk=" providerId="None" clId="Web-{CBA384F5-49A7-4DEB-A8CC-01DB6CA697DA}"/>
+    <pc:docChg chg="addSld delSld modSld sldOrd">
+      <pc:chgData name="Thomas Beckers" userId="c12k/5uIRDOZYDGGnB12/aGD+4Q6PB85erRsVU18rvk=" providerId="None" clId="Web-{CBA384F5-49A7-4DEB-A8CC-01DB6CA697DA}" dt="2026-06-12T16:52:39.895" v="287" actId="20577"/>
+      <pc:docMkLst>
+        <pc:docMk/>
+      </pc:docMkLst>
+      <pc:sldChg chg="addSp delSp modSp mod ord modClrScheme chgLayout">
+        <pc:chgData name="Thomas Beckers" userId="c12k/5uIRDOZYDGGnB12/aGD+4Q6PB85erRsVU18rvk=" providerId="None" clId="Web-{CBA384F5-49A7-4DEB-A8CC-01DB6CA697DA}" dt="2026-06-12T16:22:38.381" v="103"/>
+        <pc:sldMkLst>
+          <pc:docMk/>
+          <pc:sldMk cId="0" sldId="258"/>
+        </pc:sldMkLst>
+        <pc:spChg chg="add mod">
+          <ac:chgData name="Thomas Beckers" userId="c12k/5uIRDOZYDGGnB12/aGD+4Q6PB85erRsVU18rvk=" providerId="None" clId="Web-{CBA384F5-49A7-4DEB-A8CC-01DB6CA697DA}" dt="2026-06-12T16:11:06.586" v="37" actId="20577"/>
+          <ac:spMkLst>
+            <pc:docMk/>
+            <pc:sldMk cId="0" sldId="258"/>
+            <ac:spMk id="11" creationId="{536BFCF8-DBC4-5F40-6E69-7D96DAEA7AD1}"/>
+          </ac:spMkLst>
+        </pc:spChg>
+        <pc:spChg chg="add mod">
+          <ac:chgData name="Thomas Beckers" userId="c12k/5uIRDOZYDGGnB12/aGD+4Q6PB85erRsVU18rvk=" providerId="None" clId="Web-{CBA384F5-49A7-4DEB-A8CC-01DB6CA697DA}" dt="2026-06-12T16:22:38.381" v="103"/>
+          <ac:spMkLst>
+            <pc:docMk/>
+            <pc:sldMk cId="0" sldId="258"/>
+            <ac:spMk id="15" creationId="{0120F3A9-C749-C18E-FD37-3996164DC456}"/>
+          </ac:spMkLst>
+        </pc:spChg>
+        <pc:spChg chg="mod">
+          <ac:chgData name="Thomas Beckers" userId="c12k/5uIRDOZYDGGnB12/aGD+4Q6PB85erRsVU18rvk=" providerId="None" clId="Web-{CBA384F5-49A7-4DEB-A8CC-01DB6CA697DA}" dt="2026-06-12T16:18:44.543" v="85" actId="1076"/>
+          <ac:spMkLst>
+            <pc:docMk/>
+            <pc:sldMk cId="0" sldId="258"/>
+            <ac:spMk id="98" creationId="{00000000-0000-0000-0000-000000000000}"/>
+          </ac:spMkLst>
+        </pc:spChg>
+        <pc:spChg chg="mod">
+          <ac:chgData name="Thomas Beckers" userId="c12k/5uIRDOZYDGGnB12/aGD+4Q6PB85erRsVU18rvk=" providerId="None" clId="Web-{CBA384F5-49A7-4DEB-A8CC-01DB6CA697DA}" dt="2026-06-12T16:14:25.516" v="74" actId="1076"/>
+          <ac:spMkLst>
+            <pc:docMk/>
+            <pc:sldMk cId="0" sldId="258"/>
+            <ac:spMk id="99" creationId="{00000000-0000-0000-0000-000000000000}"/>
+          </ac:spMkLst>
+        </pc:spChg>
+        <pc:picChg chg="mod">
+          <ac:chgData name="Thomas Beckers" userId="c12k/5uIRDOZYDGGnB12/aGD+4Q6PB85erRsVU18rvk=" providerId="None" clId="Web-{CBA384F5-49A7-4DEB-A8CC-01DB6CA697DA}" dt="2026-06-12T16:18:44.543" v="86" actId="1076"/>
+          <ac:picMkLst>
+            <pc:docMk/>
+            <pc:sldMk cId="0" sldId="258"/>
+            <ac:picMk id="2" creationId="{2B676BF3-8660-9630-29DF-CBE7A3A935E7}"/>
+          </ac:picMkLst>
+        </pc:picChg>
+        <pc:picChg chg="mod">
+          <ac:chgData name="Thomas Beckers" userId="c12k/5uIRDOZYDGGnB12/aGD+4Q6PB85erRsVU18rvk=" providerId="None" clId="Web-{CBA384F5-49A7-4DEB-A8CC-01DB6CA697DA}" dt="2026-06-12T16:18:44.559" v="87" actId="1076"/>
+          <ac:picMkLst>
+            <pc:docMk/>
+            <pc:sldMk cId="0" sldId="258"/>
+            <ac:picMk id="3" creationId="{0A6B2563-D919-4FED-E756-BCB8DB29B03B}"/>
+          </ac:picMkLst>
+        </pc:picChg>
+        <pc:picChg chg="mod">
+          <ac:chgData name="Thomas Beckers" userId="c12k/5uIRDOZYDGGnB12/aGD+4Q6PB85erRsVU18rvk=" providerId="None" clId="Web-{CBA384F5-49A7-4DEB-A8CC-01DB6CA697DA}" dt="2026-06-12T16:18:44.559" v="88" actId="1076"/>
+          <ac:picMkLst>
+            <pc:docMk/>
+            <pc:sldMk cId="0" sldId="258"/>
+            <ac:picMk id="4" creationId="{A899291D-C77A-0F32-09CB-198A8812C62C}"/>
+          </ac:picMkLst>
+        </pc:picChg>
+        <pc:picChg chg="add mod">
+          <ac:chgData name="Thomas Beckers" userId="c12k/5uIRDOZYDGGnB12/aGD+4Q6PB85erRsVU18rvk=" providerId="None" clId="Web-{CBA384F5-49A7-4DEB-A8CC-01DB6CA697DA}" dt="2026-06-12T16:18:35.168" v="84" actId="1076"/>
+          <ac:picMkLst>
+            <pc:docMk/>
+            <pc:sldMk cId="0" sldId="258"/>
+            <ac:picMk id="13" creationId="{E01DD1E1-5E3F-80D5-ED99-EEC6C62F0BD4}"/>
+          </ac:picMkLst>
+        </pc:picChg>
+      </pc:sldChg>
+      <pc:sldChg chg="addSp delSp modSp ord">
+        <pc:chgData name="Thomas Beckers" userId="c12k/5uIRDOZYDGGnB12/aGD+4Q6PB85erRsVU18rvk=" providerId="None" clId="Web-{CBA384F5-49A7-4DEB-A8CC-01DB6CA697DA}" dt="2026-06-12T16:32:32.938" v="133" actId="1076"/>
+        <pc:sldMkLst>
+          <pc:docMk/>
+          <pc:sldMk cId="0" sldId="259"/>
+        </pc:sldMkLst>
+        <pc:spChg chg="add mod">
+          <ac:chgData name="Thomas Beckers" userId="c12k/5uIRDOZYDGGnB12/aGD+4Q6PB85erRsVU18rvk=" providerId="None" clId="Web-{CBA384F5-49A7-4DEB-A8CC-01DB6CA697DA}" dt="2026-06-12T16:31:24.419" v="119" actId="20577"/>
+          <ac:spMkLst>
+            <pc:docMk/>
+            <pc:sldMk cId="0" sldId="259"/>
+            <ac:spMk id="7" creationId="{389D41F7-7BB4-5ECF-F0BC-F0A3F559CF3F}"/>
+          </ac:spMkLst>
+        </pc:spChg>
+        <pc:spChg chg="mod">
+          <ac:chgData name="Thomas Beckers" userId="c12k/5uIRDOZYDGGnB12/aGD+4Q6PB85erRsVU18rvk=" providerId="None" clId="Web-{CBA384F5-49A7-4DEB-A8CC-01DB6CA697DA}" dt="2026-06-12T16:31:47.342" v="120"/>
+          <ac:spMkLst>
+            <pc:docMk/>
+            <pc:sldMk cId="0" sldId="259"/>
+            <ac:spMk id="113" creationId="{00000000-0000-0000-0000-000000000000}"/>
+          </ac:spMkLst>
+        </pc:spChg>
+        <pc:spChg chg="mod">
+          <ac:chgData name="Thomas Beckers" userId="c12k/5uIRDOZYDGGnB12/aGD+4Q6PB85erRsVU18rvk=" providerId="None" clId="Web-{CBA384F5-49A7-4DEB-A8CC-01DB6CA697DA}" dt="2026-06-12T16:31:47.342" v="121"/>
+          <ac:spMkLst>
+            <pc:docMk/>
+            <pc:sldMk cId="0" sldId="259"/>
+            <ac:spMk id="114" creationId="{00000000-0000-0000-0000-000000000000}"/>
+          </ac:spMkLst>
+        </pc:spChg>
+        <pc:spChg chg="mod">
+          <ac:chgData name="Thomas Beckers" userId="c12k/5uIRDOZYDGGnB12/aGD+4Q6PB85erRsVU18rvk=" providerId="None" clId="Web-{CBA384F5-49A7-4DEB-A8CC-01DB6CA697DA}" dt="2026-06-12T16:31:47.342" v="122"/>
+          <ac:spMkLst>
+            <pc:docMk/>
+            <pc:sldMk cId="0" sldId="259"/>
+            <ac:spMk id="115" creationId="{00000000-0000-0000-0000-000000000000}"/>
+          </ac:spMkLst>
+        </pc:spChg>
+        <pc:spChg chg="mod">
+          <ac:chgData name="Thomas Beckers" userId="c12k/5uIRDOZYDGGnB12/aGD+4Q6PB85erRsVU18rvk=" providerId="None" clId="Web-{CBA384F5-49A7-4DEB-A8CC-01DB6CA697DA}" dt="2026-06-12T16:31:47.342" v="123"/>
+          <ac:spMkLst>
+            <pc:docMk/>
+            <pc:sldMk cId="0" sldId="259"/>
+            <ac:spMk id="118" creationId="{00000000-0000-0000-0000-000000000000}"/>
+          </ac:spMkLst>
+        </pc:spChg>
+        <pc:spChg chg="mod">
+          <ac:chgData name="Thomas Beckers" userId="c12k/5uIRDOZYDGGnB12/aGD+4Q6PB85erRsVU18rvk=" providerId="None" clId="Web-{CBA384F5-49A7-4DEB-A8CC-01DB6CA697DA}" dt="2026-06-12T16:32:32.938" v="133" actId="1076"/>
+          <ac:spMkLst>
+            <pc:docMk/>
+            <pc:sldMk cId="0" sldId="259"/>
+            <ac:spMk id="121" creationId="{00000000-0000-0000-0000-000000000000}"/>
+          </ac:spMkLst>
+        </pc:spChg>
+        <pc:spChg chg="mod">
+          <ac:chgData name="Thomas Beckers" userId="c12k/5uIRDOZYDGGnB12/aGD+4Q6PB85erRsVU18rvk=" providerId="None" clId="Web-{CBA384F5-49A7-4DEB-A8CC-01DB6CA697DA}" dt="2026-06-12T16:31:47.342" v="125"/>
+          <ac:spMkLst>
+            <pc:docMk/>
+            <pc:sldMk cId="0" sldId="259"/>
+            <ac:spMk id="122" creationId="{00000000-0000-0000-0000-000000000000}"/>
+          </ac:spMkLst>
+        </pc:spChg>
+        <pc:spChg chg="mod">
+          <ac:chgData name="Thomas Beckers" userId="c12k/5uIRDOZYDGGnB12/aGD+4Q6PB85erRsVU18rvk=" providerId="None" clId="Web-{CBA384F5-49A7-4DEB-A8CC-01DB6CA697DA}" dt="2026-06-12T16:31:52.608" v="127" actId="14100"/>
+          <ac:spMkLst>
+            <pc:docMk/>
+            <pc:sldMk cId="0" sldId="259"/>
+            <ac:spMk id="123" creationId="{00000000-0000-0000-0000-000000000000}"/>
+          </ac:spMkLst>
+        </pc:spChg>
+        <pc:picChg chg="mod">
+          <ac:chgData name="Thomas Beckers" userId="c12k/5uIRDOZYDGGnB12/aGD+4Q6PB85erRsVU18rvk=" providerId="None" clId="Web-{CBA384F5-49A7-4DEB-A8CC-01DB6CA697DA}" dt="2026-06-12T16:32:25.953" v="131" actId="1076"/>
+          <ac:picMkLst>
+            <pc:docMk/>
+            <pc:sldMk cId="0" sldId="259"/>
+            <ac:picMk id="120" creationId="{00000000-0000-0000-0000-000000000000}"/>
+          </ac:picMkLst>
+        </pc:picChg>
+      </pc:sldChg>
+      <pc:sldChg chg="ord">
+        <pc:chgData name="Thomas Beckers" userId="c12k/5uIRDOZYDGGnB12/aGD+4Q6PB85erRsVU18rvk=" providerId="None" clId="Web-{CBA384F5-49A7-4DEB-A8CC-01DB6CA697DA}" dt="2026-06-12T16:08:09.141" v="20"/>
+        <pc:sldMkLst>
+          <pc:docMk/>
+          <pc:sldMk cId="0" sldId="260"/>
+        </pc:sldMkLst>
+      </pc:sldChg>
+      <pc:sldChg chg="addSp delSp modSp ord">
+        <pc:chgData name="Thomas Beckers" userId="c12k/5uIRDOZYDGGnB12/aGD+4Q6PB85erRsVU18rvk=" providerId="None" clId="Web-{CBA384F5-49A7-4DEB-A8CC-01DB6CA697DA}" dt="2026-06-12T16:49:25.684" v="211"/>
+        <pc:sldMkLst>
+          <pc:docMk/>
+          <pc:sldMk cId="0" sldId="263"/>
+        </pc:sldMkLst>
+        <pc:spChg chg="add mod">
+          <ac:chgData name="Thomas Beckers" userId="c12k/5uIRDOZYDGGnB12/aGD+4Q6PB85erRsVU18rvk=" providerId="None" clId="Web-{CBA384F5-49A7-4DEB-A8CC-01DB6CA697DA}" dt="2026-06-12T16:49:11.543" v="203" actId="20577"/>
+          <ac:spMkLst>
+            <pc:docMk/>
+            <pc:sldMk cId="0" sldId="263"/>
+            <ac:spMk id="3" creationId="{45B81C96-273D-0F89-43C2-521781E7756D}"/>
+          </ac:spMkLst>
+        </pc:spChg>
+        <pc:spChg chg="mod">
+          <ac:chgData name="Thomas Beckers" userId="c12k/5uIRDOZYDGGnB12/aGD+4Q6PB85erRsVU18rvk=" providerId="None" clId="Web-{CBA384F5-49A7-4DEB-A8CC-01DB6CA697DA}" dt="2026-06-12T16:49:25.590" v="205"/>
+          <ac:spMkLst>
+            <pc:docMk/>
+            <pc:sldMk cId="0" sldId="263"/>
+            <ac:spMk id="188" creationId="{00000000-0000-0000-0000-000000000000}"/>
+          </ac:spMkLst>
+        </pc:spChg>
+        <pc:spChg chg="mod">
+          <ac:chgData name="Thomas Beckers" userId="c12k/5uIRDOZYDGGnB12/aGD+4Q6PB85erRsVU18rvk=" providerId="None" clId="Web-{CBA384F5-49A7-4DEB-A8CC-01DB6CA697DA}" dt="2026-06-12T16:49:25.590" v="206"/>
+          <ac:spMkLst>
+            <pc:docMk/>
+            <pc:sldMk cId="0" sldId="263"/>
+            <ac:spMk id="189" creationId="{00000000-0000-0000-0000-000000000000}"/>
+          </ac:spMkLst>
+        </pc:spChg>
+        <pc:spChg chg="mod">
+          <ac:chgData name="Thomas Beckers" userId="c12k/5uIRDOZYDGGnB12/aGD+4Q6PB85erRsVU18rvk=" providerId="None" clId="Web-{CBA384F5-49A7-4DEB-A8CC-01DB6CA697DA}" dt="2026-06-12T16:49:25.590" v="207"/>
+          <ac:spMkLst>
+            <pc:docMk/>
+            <pc:sldMk cId="0" sldId="263"/>
+            <ac:spMk id="190" creationId="{00000000-0000-0000-0000-000000000000}"/>
+          </ac:spMkLst>
+        </pc:spChg>
+        <pc:spChg chg="mod">
+          <ac:chgData name="Thomas Beckers" userId="c12k/5uIRDOZYDGGnB12/aGD+4Q6PB85erRsVU18rvk=" providerId="None" clId="Web-{CBA384F5-49A7-4DEB-A8CC-01DB6CA697DA}" dt="2026-06-12T16:49:25.590" v="208"/>
+          <ac:spMkLst>
+            <pc:docMk/>
+            <pc:sldMk cId="0" sldId="263"/>
+            <ac:spMk id="191" creationId="{00000000-0000-0000-0000-000000000000}"/>
+          </ac:spMkLst>
+        </pc:spChg>
+        <pc:spChg chg="mod">
+          <ac:chgData name="Thomas Beckers" userId="c12k/5uIRDOZYDGGnB12/aGD+4Q6PB85erRsVU18rvk=" providerId="None" clId="Web-{CBA384F5-49A7-4DEB-A8CC-01DB6CA697DA}" dt="2026-06-12T16:49:25.606" v="209"/>
+          <ac:spMkLst>
+            <pc:docMk/>
+            <pc:sldMk cId="0" sldId="263"/>
+            <ac:spMk id="193" creationId="{00000000-0000-0000-0000-000000000000}"/>
+          </ac:spMkLst>
+        </pc:spChg>
+        <pc:spChg chg="mod">
+          <ac:chgData name="Thomas Beckers" userId="c12k/5uIRDOZYDGGnB12/aGD+4Q6PB85erRsVU18rvk=" providerId="None" clId="Web-{CBA384F5-49A7-4DEB-A8CC-01DB6CA697DA}" dt="2026-06-12T16:49:25.606" v="210"/>
+          <ac:spMkLst>
+            <pc:docMk/>
+            <pc:sldMk cId="0" sldId="263"/>
+            <ac:spMk id="194" creationId="{00000000-0000-0000-0000-000000000000}"/>
+          </ac:spMkLst>
+        </pc:spChg>
+        <pc:spChg chg="mod">
+          <ac:chgData name="Thomas Beckers" userId="c12k/5uIRDOZYDGGnB12/aGD+4Q6PB85erRsVU18rvk=" providerId="None" clId="Web-{CBA384F5-49A7-4DEB-A8CC-01DB6CA697DA}" dt="2026-06-12T16:49:25.684" v="211"/>
+          <ac:spMkLst>
+            <pc:docMk/>
+            <pc:sldMk cId="0" sldId="263"/>
+            <ac:spMk id="195" creationId="{00000000-0000-0000-0000-000000000000}"/>
+          </ac:spMkLst>
+        </pc:spChg>
+      </pc:sldChg>
+      <pc:sldChg chg="addSp delSp modSp ord addAnim delAnim">
+        <pc:chgData name="Thomas Beckers" userId="c12k/5uIRDOZYDGGnB12/aGD+4Q6PB85erRsVU18rvk=" providerId="None" clId="Web-{CBA384F5-49A7-4DEB-A8CC-01DB6CA697DA}" dt="2026-06-12T16:52:39.895" v="287" actId="20577"/>
+        <pc:sldMkLst>
+          <pc:docMk/>
+          <pc:sldMk cId="0" sldId="264"/>
+        </pc:sldMkLst>
+        <pc:spChg chg="add mod">
+          <ac:chgData name="Thomas Beckers" userId="c12k/5uIRDOZYDGGnB12/aGD+4Q6PB85erRsVU18rvk=" providerId="None" clId="Web-{CBA384F5-49A7-4DEB-A8CC-01DB6CA697DA}" dt="2026-06-12T16:51:05.094" v="255" actId="20577"/>
+          <ac:spMkLst>
+            <pc:docMk/>
+            <pc:sldMk cId="0" sldId="264"/>
+            <ac:spMk id="5" creationId="{F582ECF7-2C6C-3097-5B90-272C06678D87}"/>
+          </ac:spMkLst>
+        </pc:spChg>
+        <pc:spChg chg="mod">
+          <ac:chgData name="Thomas Beckers" userId="c12k/5uIRDOZYDGGnB12/aGD+4Q6PB85erRsVU18rvk=" providerId="None" clId="Web-{CBA384F5-49A7-4DEB-A8CC-01DB6CA697DA}" dt="2026-06-12T16:52:06.363" v="276" actId="20577"/>
+          <ac:spMkLst>
+            <pc:docMk/>
+            <pc:sldMk cId="0" sldId="264"/>
+            <ac:spMk id="202" creationId="{00000000-0000-0000-0000-000000000000}"/>
+          </ac:spMkLst>
+        </pc:spChg>
+        <pc:spChg chg="mod">
+          <ac:chgData name="Thomas Beckers" userId="c12k/5uIRDOZYDGGnB12/aGD+4Q6PB85erRsVU18rvk=" providerId="None" clId="Web-{CBA384F5-49A7-4DEB-A8CC-01DB6CA697DA}" dt="2026-06-12T16:51:11.110" v="256" actId="20577"/>
+          <ac:spMkLst>
+            <pc:docMk/>
+            <pc:sldMk cId="0" sldId="264"/>
+            <ac:spMk id="203" creationId="{00000000-0000-0000-0000-000000000000}"/>
+          </ac:spMkLst>
+        </pc:spChg>
+        <pc:spChg chg="mod">
+          <ac:chgData name="Thomas Beckers" userId="c12k/5uIRDOZYDGGnB12/aGD+4Q6PB85erRsVU18rvk=" providerId="None" clId="Web-{CBA384F5-49A7-4DEB-A8CC-01DB6CA697DA}" dt="2026-06-12T16:52:39.895" v="287" actId="20577"/>
+          <ac:spMkLst>
+            <pc:docMk/>
+            <pc:sldMk cId="0" sldId="264"/>
+            <ac:spMk id="206" creationId="{00000000-0000-0000-0000-000000000000}"/>
+          </ac:spMkLst>
+        </pc:spChg>
+      </pc:sldChg>
+      <pc:sldChg chg="addSp delSp modSp ord">
+        <pc:chgData name="Thomas Beckers" userId="c12k/5uIRDOZYDGGnB12/aGD+4Q6PB85erRsVU18rvk=" providerId="None" clId="Web-{CBA384F5-49A7-4DEB-A8CC-01DB6CA697DA}" dt="2026-06-12T16:22:23.099" v="102" actId="20577"/>
+        <pc:sldMkLst>
+          <pc:docMk/>
+          <pc:sldMk cId="1425547273" sldId="1592"/>
+        </pc:sldMkLst>
+        <pc:spChg chg="add mod">
+          <ac:chgData name="Thomas Beckers" userId="c12k/5uIRDOZYDGGnB12/aGD+4Q6PB85erRsVU18rvk=" providerId="None" clId="Web-{CBA384F5-49A7-4DEB-A8CC-01DB6CA697DA}" dt="2026-06-12T16:22:23.099" v="102" actId="20577"/>
+          <ac:spMkLst>
+            <pc:docMk/>
+            <pc:sldMk cId="1425547273" sldId="1592"/>
+            <ac:spMk id="6" creationId="{873979DC-006A-0397-E06D-AA26875D0999}"/>
+          </ac:spMkLst>
+        </pc:spChg>
+      </pc:sldChg>
+      <pc:sldChg chg="modSp">
+        <pc:chgData name="Thomas Beckers" userId="c12k/5uIRDOZYDGGnB12/aGD+4Q6PB85erRsVU18rvk=" providerId="None" clId="Web-{CBA384F5-49A7-4DEB-A8CC-01DB6CA697DA}" dt="2026-06-12T16:23:05.695" v="105" actId="20577"/>
+        <pc:sldMkLst>
+          <pc:docMk/>
+          <pc:sldMk cId="1216382618" sldId="1659"/>
+        </pc:sldMkLst>
+        <pc:spChg chg="mod">
+          <ac:chgData name="Thomas Beckers" userId="c12k/5uIRDOZYDGGnB12/aGD+4Q6PB85erRsVU18rvk=" providerId="None" clId="Web-{CBA384F5-49A7-4DEB-A8CC-01DB6CA697DA}" dt="2026-06-12T16:22:52.257" v="104" actId="20577"/>
+          <ac:spMkLst>
+            <pc:docMk/>
+            <pc:sldMk cId="1216382618" sldId="1659"/>
+            <ac:spMk id="8" creationId="{3EBE55E5-6A9E-A71A-9228-58FB379FD12B}"/>
+          </ac:spMkLst>
+        </pc:spChg>
+        <pc:spChg chg="mod">
+          <ac:chgData name="Thomas Beckers" userId="c12k/5uIRDOZYDGGnB12/aGD+4Q6PB85erRsVU18rvk=" providerId="None" clId="Web-{CBA384F5-49A7-4DEB-A8CC-01DB6CA697DA}" dt="2026-06-12T16:23:05.695" v="105" actId="20577"/>
+          <ac:spMkLst>
+            <pc:docMk/>
+            <pc:sldMk cId="1216382618" sldId="1659"/>
+            <ac:spMk id="10" creationId="{2B015BB2-E06E-A78F-4C50-72B4B88F7CB7}"/>
+          </ac:spMkLst>
+        </pc:spChg>
+        <pc:picChg chg="mod">
+          <ac:chgData name="Thomas Beckers" userId="c12k/5uIRDOZYDGGnB12/aGD+4Q6PB85erRsVU18rvk=" providerId="None" clId="Web-{CBA384F5-49A7-4DEB-A8CC-01DB6CA697DA}" dt="2026-06-12T16:05:53.151" v="12" actId="1076"/>
+          <ac:picMkLst>
+            <pc:docMk/>
+            <pc:sldMk cId="1216382618" sldId="1659"/>
+            <ac:picMk id="12" creationId="{0B781B97-E768-F8FE-FEDA-FDA78109501B}"/>
+          </ac:picMkLst>
+        </pc:picChg>
+      </pc:sldChg>
+      <pc:sldChg chg="addSp delSp modSp">
+        <pc:chgData name="Thomas Beckers" userId="c12k/5uIRDOZYDGGnB12/aGD+4Q6PB85erRsVU18rvk=" providerId="None" clId="Web-{CBA384F5-49A7-4DEB-A8CC-01DB6CA697DA}" dt="2026-06-12T16:10:55.726" v="33" actId="14100"/>
+        <pc:sldMkLst>
+          <pc:docMk/>
+          <pc:sldMk cId="496440186" sldId="1728"/>
+        </pc:sldMkLst>
+        <pc:spChg chg="add mod">
+          <ac:chgData name="Thomas Beckers" userId="c12k/5uIRDOZYDGGnB12/aGD+4Q6PB85erRsVU18rvk=" providerId="None" clId="Web-{CBA384F5-49A7-4DEB-A8CC-01DB6CA697DA}" dt="2026-06-12T16:10:55.726" v="33" actId="14100"/>
+          <ac:spMkLst>
+            <pc:docMk/>
+            <pc:sldMk cId="496440186" sldId="1728"/>
+            <ac:spMk id="6" creationId="{17D0CA62-6818-62EE-FD33-AE54397E0019}"/>
+          </ac:spMkLst>
+        </pc:spChg>
+      </pc:sldChg>
+      <pc:sldChg chg="addSp delSp modSp add">
+        <pc:chgData name="Thomas Beckers" userId="c12k/5uIRDOZYDGGnB12/aGD+4Q6PB85erRsVU18rvk=" providerId="None" clId="Web-{CBA384F5-49A7-4DEB-A8CC-01DB6CA697DA}" dt="2026-06-12T16:49:50.107" v="236" actId="20577"/>
+        <pc:sldMkLst>
+          <pc:docMk/>
+          <pc:sldMk cId="2921604794" sldId="1734"/>
+        </pc:sldMkLst>
+        <pc:spChg chg="add mod">
+          <ac:chgData name="Thomas Beckers" userId="c12k/5uIRDOZYDGGnB12/aGD+4Q6PB85erRsVU18rvk=" providerId="None" clId="Web-{CBA384F5-49A7-4DEB-A8CC-01DB6CA697DA}" dt="2026-06-12T16:41:20.617" v="149" actId="20577"/>
+          <ac:spMkLst>
+            <pc:docMk/>
+            <pc:sldMk cId="2921604794" sldId="1734"/>
+            <ac:spMk id="5" creationId="{28BAAE6C-6189-BD9F-3250-6A29D0450829}"/>
+          </ac:spMkLst>
+        </pc:spChg>
+        <pc:spChg chg="mod">
+          <ac:chgData name="Thomas Beckers" userId="c12k/5uIRDOZYDGGnB12/aGD+4Q6PB85erRsVU18rvk=" providerId="None" clId="Web-{CBA384F5-49A7-4DEB-A8CC-01DB6CA697DA}" dt="2026-06-12T16:41:48.086" v="156" actId="20577"/>
+          <ac:spMkLst>
+            <pc:docMk/>
+            <pc:sldMk cId="2921604794" sldId="1734"/>
+            <ac:spMk id="239" creationId="{00000000-0000-0000-0000-000000000000}"/>
+          </ac:spMkLst>
+        </pc:spChg>
+        <pc:spChg chg="mod">
+          <ac:chgData name="Thomas Beckers" userId="c12k/5uIRDOZYDGGnB12/aGD+4Q6PB85erRsVU18rvk=" providerId="None" clId="Web-{CBA384F5-49A7-4DEB-A8CC-01DB6CA697DA}" dt="2026-06-12T16:41:56.602" v="159"/>
+          <ac:spMkLst>
+            <pc:docMk/>
+            <pc:sldMk cId="2921604794" sldId="1734"/>
+            <ac:spMk id="240" creationId="{00000000-0000-0000-0000-000000000000}"/>
+          </ac:spMkLst>
+        </pc:spChg>
+        <pc:spChg chg="mod">
+          <ac:chgData name="Thomas Beckers" userId="c12k/5uIRDOZYDGGnB12/aGD+4Q6PB85erRsVU18rvk=" providerId="None" clId="Web-{CBA384F5-49A7-4DEB-A8CC-01DB6CA697DA}" dt="2026-06-12T16:43:15.043" v="186" actId="14100"/>
+          <ac:spMkLst>
+            <pc:docMk/>
+            <pc:sldMk cId="2921604794" sldId="1734"/>
+            <ac:spMk id="244" creationId="{00000000-0000-0000-0000-000000000000}"/>
+          </ac:spMkLst>
+        </pc:spChg>
+        <pc:spChg chg="mod">
+          <ac:chgData name="Thomas Beckers" userId="c12k/5uIRDOZYDGGnB12/aGD+4Q6PB85erRsVU18rvk=" providerId="None" clId="Web-{CBA384F5-49A7-4DEB-A8CC-01DB6CA697DA}" dt="2026-06-12T16:49:50.107" v="236" actId="20577"/>
+          <ac:spMkLst>
+            <pc:docMk/>
+            <pc:sldMk cId="2921604794" sldId="1734"/>
+            <ac:spMk id="251" creationId="{00000000-0000-0000-0000-000000000000}"/>
+          </ac:spMkLst>
+        </pc:spChg>
+      </pc:sldChg>
+      <pc:sldMasterChg chg="addSldLayout">
+        <pc:chgData name="Thomas Beckers" userId="c12k/5uIRDOZYDGGnB12/aGD+4Q6PB85erRsVU18rvk=" providerId="None" clId="Web-{CBA384F5-49A7-4DEB-A8CC-01DB6CA697DA}" dt="2026-06-12T16:40:25.833" v="140"/>
+        <pc:sldMasterMkLst>
+          <pc:docMk/>
+          <pc:sldMasterMk cId="3758589253" sldId="2147483952"/>
+        </pc:sldMasterMkLst>
+        <pc:sldLayoutChg chg="add">
+          <pc:chgData name="Thomas Beckers" userId="c12k/5uIRDOZYDGGnB12/aGD+4Q6PB85erRsVU18rvk=" providerId="None" clId="Web-{CBA384F5-49A7-4DEB-A8CC-01DB6CA697DA}" dt="2026-06-12T16:40:25.833" v="140"/>
+          <pc:sldLayoutMkLst>
+            <pc:docMk/>
+            <pc:sldMasterMk cId="3758589253" sldId="2147483952"/>
+            <pc:sldLayoutMk cId="1329926119" sldId="2147484130"/>
+          </pc:sldLayoutMkLst>
+        </pc:sldLayoutChg>
+      </pc:sldMasterChg>
+    </pc:docChg>
+  </pc:docChgLst>
+</pc:chgInfo>
 </file>
 
 <file path=ppt/handoutMasters/handoutMaster1.xml><?xml version="1.0" encoding="utf-8"?>
@@ -265,7 +1162,7 @@
           <a:p>
             <a:fld id="{2A6FAD2F-3255-4D6B-B7D0-3AD777FD6E16}" type="datetimeFigureOut">
               <a:rPr lang="en-US" smtClean="0"/>
-              <a:t>6/16/2026</a:t>
+              <a:t>6/16/26</a:t>
             </a:fld>
             <a:endParaRPr lang="en-US"/>
           </a:p>
@@ -587,7 +1484,7 @@
           <a:p>
             <a:fld id="{87CA7F51-485C-4411-96B4-8DBF10CDD334}" type="datetimeFigureOut">
               <a:rPr lang="en-US" smtClean="0"/>
-              <a:t>6/16/2026</a:t>
+              <a:t>6/16/26</a:t>
             </a:fld>
             <a:endParaRPr lang="en-US"/>
           </a:p>
@@ -6808,6 +7705,218 @@
           <p:cNvPr id="2" name="Slide Number Placeholder 1">
             <a:extLst>
               <a:ext uri="{FF2B5EF4-FFF2-40B4-BE49-F238E27FC236}">
+                <a16:creationId xmlns:a16="http://schemas.microsoft.com/office/drawing/2014/main" id="{DA0D77E0-5280-AEAA-96BE-A64C79714B58}"/>
+              </a:ext>
+            </a:extLst>
+          </p:cNvPr>
+          <p:cNvSpPr>
+            <a:spLocks noGrp="1"/>
+          </p:cNvSpPr>
+          <p:nvPr>
+            <p:ph type="sldNum" sz="quarter" idx="12"/>
+          </p:nvPr>
+        </p:nvSpPr>
+        <p:spPr/>
+        <p:txBody>
+          <a:bodyPr/>
+          <a:lstStyle/>
+          <a:p>
+            <a:fld id="{FE7A4BB3-E848-5A44-82DF-322201952CD8}" type="slidenum">
+              <a:rPr lang="en-US" smtClean="0"/>
+              <a:pPr/>
+              <a:t>12</a:t>
+            </a:fld>
+            <a:endParaRPr lang="en-US" dirty="0"/>
+          </a:p>
+        </p:txBody>
+      </p:sp>
+      <p:sp>
+        <p:nvSpPr>
+          <p:cNvPr id="3" name="Title 2">
+            <a:extLst>
+              <a:ext uri="{FF2B5EF4-FFF2-40B4-BE49-F238E27FC236}">
+                <a16:creationId xmlns:a16="http://schemas.microsoft.com/office/drawing/2014/main" id="{2C6114CC-B0C2-E8CB-A1AB-E6478081A72D}"/>
+              </a:ext>
+            </a:extLst>
+          </p:cNvPr>
+          <p:cNvSpPr>
+            <a:spLocks noGrp="1"/>
+          </p:cNvSpPr>
+          <p:nvPr>
+            <p:ph type="title"/>
+          </p:nvPr>
+        </p:nvSpPr>
+        <p:spPr/>
+        <p:txBody>
+          <a:bodyPr/>
+          <a:lstStyle/>
+          <a:p>
+            <a:r>
+              <a:rPr lang="en-US" dirty="0" err="1"/>
+              <a:t>HUANet</a:t>
+            </a:r>
+            <a:r>
+              <a:rPr lang="en-US" dirty="0"/>
+              <a:t> Example in Python + JAX</a:t>
+            </a:r>
+          </a:p>
+        </p:txBody>
+      </p:sp>
+      <p:sp>
+        <p:nvSpPr>
+          <p:cNvPr id="4" name="Content Placeholder 3">
+            <a:extLst>
+              <a:ext uri="{FF2B5EF4-FFF2-40B4-BE49-F238E27FC236}">
+                <a16:creationId xmlns:a16="http://schemas.microsoft.com/office/drawing/2014/main" id="{911939F8-D5D1-72C3-7B6E-7795FC726645}"/>
+              </a:ext>
+            </a:extLst>
+          </p:cNvPr>
+          <p:cNvSpPr>
+            <a:spLocks noGrp="1"/>
+          </p:cNvSpPr>
+          <p:nvPr>
+            <p:ph sz="quarter" idx="20"/>
+          </p:nvPr>
+        </p:nvSpPr>
+        <p:spPr>
+          <a:xfrm>
+            <a:off x="272005" y="3146796"/>
+            <a:ext cx="8586245" cy="1568079"/>
+          </a:xfrm>
+        </p:spPr>
+        <p:txBody>
+          <a:bodyPr/>
+          <a:lstStyle/>
+          <a:p>
+            <a:pPr marL="0" indent="0">
+              <a:buNone/>
+            </a:pPr>
+            <a:r>
+              <a:rPr lang="en-US" sz="1800" dirty="0">
+                <a:hlinkClick r:id="rId2"/>
+              </a:rPr>
+              <a:t>https://colab.research.google.com/github/SciML-L4DC2026/SciML-L4DC2026/blob/main/notebooks/L2O/Example_2_HUANet/HUANet_entropy.ipynb</a:t>
+            </a:r>
+            <a:r>
+              <a:rPr lang="en-US" sz="1800" dirty="0"/>
+              <a:t> </a:t>
+            </a:r>
+          </a:p>
+        </p:txBody>
+      </p:sp>
+      <p:pic>
+        <p:nvPicPr>
+          <p:cNvPr id="6" name="Picture 5">
+            <a:extLst>
+              <a:ext uri="{FF2B5EF4-FFF2-40B4-BE49-F238E27FC236}">
+                <a16:creationId xmlns:a16="http://schemas.microsoft.com/office/drawing/2014/main" id="{A435BEAC-312B-09E0-71B8-04540A219425}"/>
+              </a:ext>
+            </a:extLst>
+          </p:cNvPr>
+          <p:cNvPicPr>
+            <a:picLocks noChangeAspect="1"/>
+          </p:cNvPicPr>
+          <p:nvPr/>
+        </p:nvPicPr>
+        <p:blipFill>
+          <a:blip r:embed="rId3">
+            <a:extLst>
+              <a:ext uri="{28A0092B-C50C-407E-A947-70E740481C1C}">
+                <a14:useLocalDpi xmlns:a14="http://schemas.microsoft.com/office/drawing/2010/main" val="0"/>
+              </a:ext>
+            </a:extLst>
+          </a:blip>
+          <a:stretch>
+            <a:fillRect/>
+          </a:stretch>
+        </p:blipFill>
+        <p:spPr>
+          <a:xfrm>
+            <a:off x="1034220" y="910411"/>
+            <a:ext cx="1936004" cy="1947632"/>
+          </a:xfrm>
+          <a:prstGeom prst="rect">
+            <a:avLst/>
+          </a:prstGeom>
+        </p:spPr>
+      </p:pic>
+      <p:pic>
+        <p:nvPicPr>
+          <p:cNvPr id="7" name="Picture 6">
+            <a:extLst>
+              <a:ext uri="{FF2B5EF4-FFF2-40B4-BE49-F238E27FC236}">
+                <a16:creationId xmlns:a16="http://schemas.microsoft.com/office/drawing/2014/main" id="{85C57602-5305-C72F-F8F3-47599A5C7EA4}"/>
+              </a:ext>
+            </a:extLst>
+          </p:cNvPr>
+          <p:cNvPicPr>
+            <a:picLocks noChangeAspect="1"/>
+          </p:cNvPicPr>
+          <p:nvPr/>
+        </p:nvPicPr>
+        <p:blipFill>
+          <a:blip r:embed="rId4"/>
+          <a:stretch>
+            <a:fillRect/>
+          </a:stretch>
+        </p:blipFill>
+        <p:spPr>
+          <a:xfrm>
+            <a:off x="3604526" y="1122508"/>
+            <a:ext cx="5082274" cy="1449242"/>
+          </a:xfrm>
+          <a:prstGeom prst="rect">
+            <a:avLst/>
+          </a:prstGeom>
+        </p:spPr>
+      </p:pic>
+    </p:spTree>
+    <p:extLst>
+      <p:ext uri="{BB962C8B-B14F-4D97-AF65-F5344CB8AC3E}">
+        <p14:creationId xmlns:p14="http://schemas.microsoft.com/office/powerpoint/2010/main" val="1146463670"/>
+      </p:ext>
+    </p:extLst>
+  </p:cSld>
+  <p:clrMapOvr>
+    <a:masterClrMapping/>
+  </p:clrMapOvr>
+  <mc:AlternateContent xmlns:mc="http://schemas.openxmlformats.org/markup-compatibility/2006" xmlns:p14="http://schemas.microsoft.com/office/powerpoint/2010/main">
+    <mc:Choice Requires="p14">
+      <p:transition spd="med" p14:dur="700">
+        <p:fade/>
+      </p:transition>
+    </mc:Choice>
+    <mc:Fallback xmlns="">
+      <p:transition spd="med">
+        <p:fade/>
+      </p:transition>
+    </mc:Fallback>
+  </mc:AlternateContent>
+</p:sld>
+</file>
+
+<file path=ppt/slides/slide13.xml><?xml version="1.0" encoding="utf-8"?>
+<p:sld xmlns:a="http://schemas.openxmlformats.org/drawingml/2006/main" xmlns:r="http://schemas.openxmlformats.org/officeDocument/2006/relationships" xmlns:p="http://schemas.openxmlformats.org/presentationml/2006/main">
+  <p:cSld>
+    <p:spTree>
+      <p:nvGrpSpPr>
+        <p:cNvPr id="1" name=""/>
+        <p:cNvGrpSpPr/>
+        <p:nvPr/>
+      </p:nvGrpSpPr>
+      <p:grpSpPr>
+        <a:xfrm>
+          <a:off x="0" y="0"/>
+          <a:ext cx="0" cy="0"/>
+          <a:chOff x="0" y="0"/>
+          <a:chExt cx="0" cy="0"/>
+        </a:xfrm>
+      </p:grpSpPr>
+      <p:sp>
+        <p:nvSpPr>
+          <p:cNvPr id="2" name="Slide Number Placeholder 1">
+            <a:extLst>
+              <a:ext uri="{FF2B5EF4-FFF2-40B4-BE49-F238E27FC236}">
                 <a16:creationId xmlns:a16="http://schemas.microsoft.com/office/drawing/2014/main" id="{F0ABB71F-9C56-4B8C-B038-3260D001533B}"/>
               </a:ext>
             </a:extLst>
@@ -6828,7 +7937,7 @@
             <a:fld id="{FE7A4BB3-E848-5A44-82DF-322201952CD8}" type="slidenum">
               <a:rPr lang="en-US" smtClean="0"/>
               <a:pPr defTabSz="685745"/>
-              <a:t>12</a:t>
+              <a:t>13</a:t>
             </a:fld>
             <a:endParaRPr lang="en-US" dirty="0"/>
           </a:p>
@@ -7395,11 +8504,18 @@
           <a:p>
             <a:pPr marL="685165" lvl="1" indent="-227965"/>
             <a:r>
+              <a:rPr lang="en-US" sz="1400" dirty="0" err="1">
+                <a:latin typeface="Arial"/>
+                <a:cs typeface="Arial"/>
+              </a:rPr>
+              <a:t>PIMLXplore</a:t>
+            </a:r>
+            <a:r>
               <a:rPr lang="en-US" sz="1400" dirty="0">
                 <a:latin typeface="Arial"/>
                 <a:cs typeface="Arial"/>
               </a:rPr>
-              <a:t>PIMLXplore: </a:t>
+              <a:t>: </a:t>
             </a:r>
             <a:r>
               <a:rPr lang="en-US" sz="1400" dirty="0">
@@ -7433,60 +8549,44 @@
             </a:r>
           </a:p>
           <a:p>
-            <a:pPr marL="685165" lvl="1" indent="-227965"/>
-            <a:r>
-              <a:rPr lang="en-US" sz="1400" dirty="0">
-                <a:latin typeface="Arial"/>
-                <a:cs typeface="Arial"/>
-                <a:hlinkClick r:id="rId4"/>
-              </a:rPr>
-              <a:t>github.com/pnnl/neuromancer</a:t>
-            </a:r>
-            <a:endParaRPr lang="en-US" sz="1400" dirty="0">
-              <a:latin typeface="Arial"/>
-              <a:cs typeface="Arial"/>
-            </a:endParaRPr>
-          </a:p>
-          <a:p>
             <a:pPr marL="227965" indent="-227965"/>
             <a:r>
-              <a:rPr lang="en-US" sz="1400" b="1" dirty="0">
-                <a:latin typeface="Arial"/>
-                <a:cs typeface="Arial"/>
-              </a:rPr>
-              <a:t>Hiring in SciML!!! </a:t>
+              <a:rPr lang="en-US" sz="1600" b="1" dirty="0"/>
+              <a:t>Hiring in </a:t>
+            </a:r>
+            <a:r>
+              <a:rPr lang="en-US" sz="1600" b="1" dirty="0" err="1"/>
+              <a:t>SciML</a:t>
+            </a:r>
+            <a:r>
+              <a:rPr lang="en-US" sz="1600" b="1" dirty="0"/>
+              <a:t>!!! </a:t>
             </a:r>
             <a:r>
               <a:rPr lang="en-US" sz="1600" b="1" dirty="0">
-                <a:latin typeface="Arial"/>
                 <a:ea typeface="Tahoma"/>
-                <a:cs typeface="Arial"/>
               </a:rPr>
               <a:t>   </a:t>
             </a:r>
             <a:r>
               <a:rPr lang="en-US" sz="1600" dirty="0">
-                <a:latin typeface="Arial"/>
                 <a:ea typeface="Tahoma"/>
-                <a:cs typeface="Arial"/>
-                <a:hlinkClick r:id="rId5"/>
+                <a:hlinkClick r:id="rId4"/>
               </a:rPr>
               <a:t>nxt@ucf.edu</a:t>
             </a:r>
             <a:endParaRPr lang="en-US" sz="1600" dirty="0">
-              <a:latin typeface="Arial"/>
               <a:ea typeface="Tahoma"/>
-              <a:cs typeface="Arial"/>
             </a:endParaRPr>
           </a:p>
         </p:txBody>
       </p:sp>
       <p:pic>
         <p:nvPicPr>
-          <p:cNvPr id="6" name="Picture 5" descr="A computer screen with a black background&#10;&#10;AI-generated content may be incorrect.">
+          <p:cNvPr id="4" name="Picture 3">
             <a:extLst>
               <a:ext uri="{FF2B5EF4-FFF2-40B4-BE49-F238E27FC236}">
-                <a16:creationId xmlns:a16="http://schemas.microsoft.com/office/drawing/2014/main" id="{2FADCA01-C757-BCB3-417A-B0299DF63D08}"/>
+                <a16:creationId xmlns:a16="http://schemas.microsoft.com/office/drawing/2014/main" id="{E85FE150-E9A2-979E-DE77-E06CE26D3C09}"/>
               </a:ext>
             </a:extLst>
           </p:cNvPr>
@@ -7496,7 +8596,7 @@
           <p:nvPr/>
         </p:nvPicPr>
         <p:blipFill rotWithShape="1">
-          <a:blip r:embed="rId6">
+          <a:blip r:embed="rId5">
             <a:extLst>
               <a:ext uri="{28A0092B-C50C-407E-A947-70E740481C1C}">
                 <a14:useLocalDpi xmlns:a14="http://schemas.microsoft.com/office/drawing/2010/main" val="0"/>
@@ -7508,7 +8608,7 @@
         </p:blipFill>
         <p:spPr>
           <a:xfrm>
-            <a:off x="1265559" y="3590139"/>
+            <a:off x="1495148" y="3586512"/>
             <a:ext cx="6139958" cy="1389182"/>
           </a:xfrm>
           <a:prstGeom prst="rect">
@@ -17328,10 +18428,10 @@
       </p:cxnSp>
       <p:pic>
         <p:nvPicPr>
-          <p:cNvPr id="10" name="Picture 9" descr="A screenshot of a computer&#10;&#10;AI-generated content may be incorrect.">
+          <p:cNvPr id="16" name="Picture 15">
             <a:extLst>
               <a:ext uri="{FF2B5EF4-FFF2-40B4-BE49-F238E27FC236}">
-                <a16:creationId xmlns:a16="http://schemas.microsoft.com/office/drawing/2014/main" id="{5ECE4E11-D653-1782-E26B-FE8D7CB1C609}"/>
+                <a16:creationId xmlns:a16="http://schemas.microsoft.com/office/drawing/2014/main" id="{ACA426C9-AE1A-307D-C599-DC2F53CD9B91}"/>
               </a:ext>
             </a:extLst>
           </p:cNvPr>
@@ -17342,15 +18442,14 @@
         </p:nvPicPr>
         <p:blipFill>
           <a:blip r:embed="rId7"/>
-          <a:srcRect l="48" t="39039" r="154" b="387"/>
           <a:stretch>
             <a:fillRect/>
           </a:stretch>
         </p:blipFill>
         <p:spPr>
           <a:xfrm>
-            <a:off x="300805" y="2049161"/>
-            <a:ext cx="8486950" cy="3043561"/>
+            <a:off x="351317" y="2087789"/>
+            <a:ext cx="7532701" cy="2725995"/>
           </a:xfrm>
           <a:prstGeom prst="rect">
             <a:avLst/>
@@ -17379,6 +18478,81 @@
       </p:transition>
     </mc:Fallback>
   </mc:AlternateContent>
+  <p:timing>
+    <p:tnLst>
+      <p:par>
+        <p:cTn id="1" dur="indefinite" restart="never" nodeType="tmRoot">
+          <p:childTnLst>
+            <p:seq concurrent="1" nextAc="seek">
+              <p:cTn id="2" dur="indefinite" nodeType="mainSeq">
+                <p:childTnLst>
+                  <p:par>
+                    <p:cTn id="3" fill="hold">
+                      <p:stCondLst>
+                        <p:cond delay="indefinite"/>
+                      </p:stCondLst>
+                      <p:childTnLst>
+                        <p:par>
+                          <p:cTn id="4" fill="hold">
+                            <p:stCondLst>
+                              <p:cond delay="0"/>
+                            </p:stCondLst>
+                            <p:childTnLst>
+                              <p:par>
+                                <p:cTn id="5" presetID="1" presetClass="entr" presetSubtype="0" fill="hold" nodeType="clickEffect">
+                                  <p:stCondLst>
+                                    <p:cond delay="0"/>
+                                  </p:stCondLst>
+                                  <p:childTnLst>
+                                    <p:set>
+                                      <p:cBhvr>
+                                        <p:cTn id="6" dur="1" fill="hold">
+                                          <p:stCondLst>
+                                            <p:cond delay="0"/>
+                                          </p:stCondLst>
+                                        </p:cTn>
+                                        <p:tgtEl>
+                                          <p:spTgt spid="16"/>
+                                        </p:tgtEl>
+                                        <p:attrNameLst>
+                                          <p:attrName>style.visibility</p:attrName>
+                                        </p:attrNameLst>
+                                      </p:cBhvr>
+                                      <p:to>
+                                        <p:strVal val="visible"/>
+                                      </p:to>
+                                    </p:set>
+                                  </p:childTnLst>
+                                </p:cTn>
+                              </p:par>
+                            </p:childTnLst>
+                          </p:cTn>
+                        </p:par>
+                      </p:childTnLst>
+                    </p:cTn>
+                  </p:par>
+                </p:childTnLst>
+              </p:cTn>
+              <p:prevCondLst>
+                <p:cond evt="onPrev" delay="0">
+                  <p:tgtEl>
+                    <p:sldTgt/>
+                  </p:tgtEl>
+                </p:cond>
+              </p:prevCondLst>
+              <p:nextCondLst>
+                <p:cond evt="onNext" delay="0">
+                  <p:tgtEl>
+                    <p:sldTgt/>
+                  </p:tgtEl>
+                </p:cond>
+              </p:nextCondLst>
+            </p:seq>
+          </p:childTnLst>
+        </p:cTn>
+      </p:par>
+    </p:tnLst>
+  </p:timing>
 </p:sld>
 </file>
 
@@ -17550,7 +18724,7 @@
               </a:rPr>
               <a:t> </a:t>
             </a:r>
-            <a:endParaRPr lang="en-US">
+            <a:endParaRPr lang="en-US" dirty="0">
               <a:ea typeface="+mn-lt"/>
               <a:cs typeface="+mn-lt"/>
             </a:endParaRPr>
@@ -17801,13 +18975,13 @@
   <p:clrMapOvr>
     <a:masterClrMapping/>
   </p:clrMapOvr>
-  <mc:AlternateContent xmlns:mc="http://schemas.openxmlformats.org/markup-compatibility/2006">
-    <mc:Choice xmlns:p14="http://schemas.microsoft.com/office/powerpoint/2010/main" Requires="p14">
+  <mc:AlternateContent xmlns:mc="http://schemas.openxmlformats.org/markup-compatibility/2006" xmlns:p14="http://schemas.microsoft.com/office/powerpoint/2010/main">
+    <mc:Choice Requires="p14">
       <p:transition spd="med" p14:dur="700">
         <p:fade/>
       </p:transition>
     </mc:Choice>
-    <mc:Fallback>
+    <mc:Fallback xmlns="">
       <p:transition spd="med">
         <p:fade/>
       </p:transition>
@@ -22183,64 +23357,6 @@
 </file>
 
 <file path=customXml/item1.xml><?xml version="1.0" encoding="utf-8"?>
-<p:properties xmlns:p="http://schemas.microsoft.com/office/2006/metadata/properties" xmlns:xsi="http://www.w3.org/2001/XMLSchema-instance" xmlns:pc="http://schemas.microsoft.com/office/infopath/2007/PartnerControls">
-  <documentManagement>
-    <SharedWithUsers xmlns="168931df-3f45-4445-be76-105235143e52">
-      <UserInfo>
-        <DisplayName>CLDT Members</DisplayName>
-        <AccountId>7</AccountId>
-        <AccountType/>
-      </UserInfo>
-      <UserInfo>
-        <DisplayName>Leonid Felikson</DisplayName>
-        <AccountId>722</AccountId>
-        <AccountType/>
-      </UserInfo>
-      <UserInfo>
-        <DisplayName>Michelle Nguyen</DisplayName>
-        <AccountId>3986</AccountId>
-        <AccountType/>
-      </UserInfo>
-      <UserInfo>
-        <DisplayName>Natalie Wang</DisplayName>
-        <AccountId>7948</AccountId>
-        <AccountType/>
-      </UserInfo>
-      <UserInfo>
-        <DisplayName>Danielle Lynd</DisplayName>
-        <AccountId>4194</AccountId>
-        <AccountType/>
-      </UserInfo>
-      <UserInfo>
-        <DisplayName>Chongyu Qu</DisplayName>
-        <AccountId>4616</AccountId>
-        <AccountType/>
-      </UserInfo>
-      <UserInfo>
-        <DisplayName>Astrid Santiago</DisplayName>
-        <AccountId>10364</AccountId>
-        <AccountType/>
-      </UserInfo>
-    </SharedWithUsers>
-    <lcf76f155ced4ddcb4097134ff3c332f xmlns="e3b5c32c-df6c-443f-b08b-73d85d62f2b5">
-      <Terms xmlns="http://schemas.microsoft.com/office/infopath/2007/PartnerControls"/>
-    </lcf76f155ced4ddcb4097134ff3c332f>
-    <TaxCatchAll xmlns="168931df-3f45-4445-be76-105235143e52" xsi:nil="true"/>
-    <Tag xmlns="e3b5c32c-df6c-443f-b08b-73d85d62f2b5" xsi:nil="true"/>
-  </documentManagement>
-</p:properties>
-</file>
-
-<file path=customXml/item2.xml><?xml version="1.0" encoding="utf-8"?>
-<?mso-contentType ?>
-<FormTemplates xmlns="http://schemas.microsoft.com/sharepoint/v3/contenttype/forms">
-  <Display>DocumentLibraryForm</Display>
-  <Edit>DocumentLibraryForm</Edit>
-  <New>DocumentLibraryForm</New>
-</FormTemplates>
-</file>
-
-<file path=customXml/item3.xml><?xml version="1.0" encoding="utf-8"?>
 <ct:contentTypeSchema xmlns:ct="http://schemas.microsoft.com/office/2006/metadata/contentType" xmlns:ma="http://schemas.microsoft.com/office/2006/metadata/properties/metaAttributes" ct:_="" ma:_="" ma:contentTypeName="Document" ma:contentTypeID="0x010100681B81209776AF40B8AAD3C366C78D42" ma:contentTypeVersion="19" ma:contentTypeDescription="Create a new document." ma:contentTypeScope="" ma:versionID="fbb3406e25de908b5a868738d5cb1834">
   <xsd:schema xmlns:xsd="http://www.w3.org/2001/XMLSchema" xmlns:xs="http://www.w3.org/2001/XMLSchema" xmlns:p="http://schemas.microsoft.com/office/2006/metadata/properties" xmlns:ns2="e3b5c32c-df6c-443f-b08b-73d85d62f2b5" xmlns:ns3="168931df-3f45-4445-be76-105235143e52" targetNamespace="http://schemas.microsoft.com/office/2006/metadata/properties" ma:root="true" ma:fieldsID="a51a2fd210533027d0c682d7a8bd76c2" ns2:_="" ns3:_="">
     <xsd:import namespace="e3b5c32c-df6c-443f-b08b-73d85d62f2b5"/>
@@ -22503,7 +23619,84 @@
 </ct:contentTypeSchema>
 </file>
 
+<file path=customXml/item2.xml><?xml version="1.0" encoding="utf-8"?>
+<p:properties xmlns:p="http://schemas.microsoft.com/office/2006/metadata/properties" xmlns:xsi="http://www.w3.org/2001/XMLSchema-instance" xmlns:pc="http://schemas.microsoft.com/office/infopath/2007/PartnerControls">
+  <documentManagement>
+    <SharedWithUsers xmlns="168931df-3f45-4445-be76-105235143e52">
+      <UserInfo>
+        <DisplayName>CLDT Members</DisplayName>
+        <AccountId>7</AccountId>
+        <AccountType/>
+      </UserInfo>
+      <UserInfo>
+        <DisplayName>Leonid Felikson</DisplayName>
+        <AccountId>722</AccountId>
+        <AccountType/>
+      </UserInfo>
+      <UserInfo>
+        <DisplayName>Michelle Nguyen</DisplayName>
+        <AccountId>3986</AccountId>
+        <AccountType/>
+      </UserInfo>
+      <UserInfo>
+        <DisplayName>Natalie Wang</DisplayName>
+        <AccountId>7948</AccountId>
+        <AccountType/>
+      </UserInfo>
+      <UserInfo>
+        <DisplayName>Danielle Lynd</DisplayName>
+        <AccountId>4194</AccountId>
+        <AccountType/>
+      </UserInfo>
+      <UserInfo>
+        <DisplayName>Chongyu Qu</DisplayName>
+        <AccountId>4616</AccountId>
+        <AccountType/>
+      </UserInfo>
+      <UserInfo>
+        <DisplayName>Astrid Santiago</DisplayName>
+        <AccountId>10364</AccountId>
+        <AccountType/>
+      </UserInfo>
+    </SharedWithUsers>
+    <lcf76f155ced4ddcb4097134ff3c332f xmlns="e3b5c32c-df6c-443f-b08b-73d85d62f2b5">
+      <Terms xmlns="http://schemas.microsoft.com/office/infopath/2007/PartnerControls"/>
+    </lcf76f155ced4ddcb4097134ff3c332f>
+    <TaxCatchAll xmlns="168931df-3f45-4445-be76-105235143e52" xsi:nil="true"/>
+    <Tag xmlns="e3b5c32c-df6c-443f-b08b-73d85d62f2b5" xsi:nil="true"/>
+  </documentManagement>
+</p:properties>
+</file>
+
+<file path=customXml/item3.xml><?xml version="1.0" encoding="utf-8"?>
+<?mso-contentType ?>
+<FormTemplates xmlns="http://schemas.microsoft.com/sharepoint/v3/contenttype/forms">
+  <Display>DocumentLibraryForm</Display>
+  <Edit>DocumentLibraryForm</Edit>
+  <New>DocumentLibraryForm</New>
+</FormTemplates>
+</file>
+
 <file path=customXml/itemProps1.xml><?xml version="1.0" encoding="utf-8"?>
+<ds:datastoreItem xmlns:ds="http://schemas.openxmlformats.org/officeDocument/2006/customXml" ds:itemID="{BD0C1DF4-4B0B-4532-AD5E-FC8A9D25A061}">
+  <ds:schemaRefs>
+    <ds:schemaRef ds:uri="http://schemas.microsoft.com/office/2006/metadata/contentType"/>
+    <ds:schemaRef ds:uri="http://schemas.microsoft.com/office/2006/metadata/properties/metaAttributes"/>
+    <ds:schemaRef ds:uri="http://www.w3.org/2001/XMLSchema"/>
+    <ds:schemaRef ds:uri="http://schemas.microsoft.com/office/2006/metadata/properties"/>
+    <ds:schemaRef ds:uri="e3b5c32c-df6c-443f-b08b-73d85d62f2b5"/>
+    <ds:schemaRef ds:uri="168931df-3f45-4445-be76-105235143e52"/>
+    <ds:schemaRef ds:uri="http://schemas.microsoft.com/office/2006/documentManagement/types"/>
+    <ds:schemaRef ds:uri="http://schemas.microsoft.com/office/infopath/2007/PartnerControls"/>
+    <ds:schemaRef ds:uri="http://schemas.openxmlformats.org/package/2006/metadata/core-properties"/>
+    <ds:schemaRef ds:uri="http://purl.org/dc/elements/1.1/"/>
+    <ds:schemaRef ds:uri="http://purl.org/dc/terms/"/>
+    <ds:schemaRef ds:uri="http://schemas.microsoft.com/internal/obd"/>
+  </ds:schemaRefs>
+</ds:datastoreItem>
+</file>
+
+<file path=customXml/itemProps2.xml><?xml version="1.0" encoding="utf-8"?>
 <ds:datastoreItem xmlns:ds="http://schemas.openxmlformats.org/officeDocument/2006/customXml" ds:itemID="{F8A04465-0014-4D33-ABA2-D6924F11FEE0}">
   <ds:schemaRefs>
     <ds:schemaRef ds:uri="http://purl.org/dc/elements/1.1/"/>
@@ -22520,29 +23713,10 @@
 </ds:datastoreItem>
 </file>
 
-<file path=customXml/itemProps2.xml><?xml version="1.0" encoding="utf-8"?>
+<file path=customXml/itemProps3.xml><?xml version="1.0" encoding="utf-8"?>
 <ds:datastoreItem xmlns:ds="http://schemas.openxmlformats.org/officeDocument/2006/customXml" ds:itemID="{0F8F7E09-D485-4407-984B-97D2EA2C8D55}">
   <ds:schemaRefs>
     <ds:schemaRef ds:uri="http://schemas.microsoft.com/sharepoint/v3/contenttype/forms"/>
   </ds:schemaRefs>
 </ds:datastoreItem>
-</file>
-
-<file path=customXml/itemProps3.xml><?xml version="1.0" encoding="utf-8"?>
-<ds:datastoreItem xmlns:ds="http://schemas.openxmlformats.org/officeDocument/2006/customXml" ds:itemID="{BD0C1DF4-4B0B-4532-AD5E-FC8A9D25A061}">
-  <ds:schemaRefs>
-    <ds:schemaRef ds:uri="http://schemas.microsoft.com/office/2006/metadata/contentType"/>
-    <ds:schemaRef ds:uri="http://schemas.microsoft.com/office/2006/metadata/properties/metaAttributes"/>
-    <ds:schemaRef ds:uri="http://www.w3.org/2001/XMLSchema"/>
-    <ds:schemaRef ds:uri="http://schemas.microsoft.com/office/2006/metadata/properties"/>
-    <ds:schemaRef ds:uri="e3b5c32c-df6c-443f-b08b-73d85d62f2b5"/>
-    <ds:schemaRef ds:uri="168931df-3f45-4445-be76-105235143e52"/>
-    <ds:schemaRef ds:uri="http://schemas.microsoft.com/office/2006/documentManagement/types"/>
-    <ds:schemaRef ds:uri="http://schemas.microsoft.com/office/infopath/2007/PartnerControls"/>
-    <ds:schemaRef ds:uri="http://schemas.openxmlformats.org/package/2006/metadata/core-properties"/>
-    <ds:schemaRef ds:uri="http://purl.org/dc/elements/1.1/"/>
-    <ds:schemaRef ds:uri="http://purl.org/dc/terms/"/>
-    <ds:schemaRef ds:uri="http://schemas.microsoft.com/internal/obd"/>
-  </ds:schemaRefs>
-</ds:datastoreItem>
 </file>
--- a/slides/L2O.pptx
+++ b/slides/L2O.pptx
@@ -627,6 +627,22 @@
     </pc:docChg>
   </pc:docChgLst>
   <pc:docChgLst>
+    <pc:chgData name="Truong Nghiem" userId="vBvvVE8C9ugQCln+04XOl7ubP+936WO3hfIf0AxT0gg=" providerId="None" clId="Web-{691735D0-ED1A-414C-9C4A-C9A78CFB774E}"/>
+    <pc:docChg chg="addSld delSld">
+      <pc:chgData name="Truong Nghiem" userId="vBvvVE8C9ugQCln+04XOl7ubP+936WO3hfIf0AxT0gg=" providerId="None" clId="Web-{691735D0-ED1A-414C-9C4A-C9A78CFB774E}" dt="2026-06-14T18:28:20.179" v="1"/>
+      <pc:docMkLst>
+        <pc:docMk/>
+      </pc:docMkLst>
+      <pc:sldChg chg="new del">
+        <pc:chgData name="Truong Nghiem" userId="vBvvVE8C9ugQCln+04XOl7ubP+936WO3hfIf0AxT0gg=" providerId="None" clId="Web-{691735D0-ED1A-414C-9C4A-C9A78CFB774E}" dt="2026-06-14T18:28:20.179" v="1"/>
+        <pc:sldMkLst>
+          <pc:docMk/>
+          <pc:sldMk cId="1436794479" sldId="1742"/>
+        </pc:sldMkLst>
+      </pc:sldChg>
+    </pc:docChg>
+  </pc:docChgLst>
+  <pc:docChgLst>
     <pc:chgData name="Truong Nghiem" userId="vBvvVE8C9ugQCln+04XOl7ubP+936WO3hfIf0AxT0gg=" providerId="None" clId="Web-{639CEFE1-EC7A-446D-9E78-1AEADC4C61F0}"/>
     <pc:docChg chg="modSld">
       <pc:chgData name="Truong Nghiem" userId="vBvvVE8C9ugQCln+04XOl7ubP+936WO3hfIf0AxT0gg=" providerId="None" clId="Web-{639CEFE1-EC7A-446D-9E78-1AEADC4C61F0}" dt="2026-06-14T12:39:58.933" v="0"/>
@@ -647,22 +663,6 @@
             <ac:picMk id="1034" creationId="{0BC5F26E-D245-6E8C-EB40-1D24863D5359}"/>
           </ac:picMkLst>
         </pc:picChg>
-      </pc:sldChg>
-    </pc:docChg>
-  </pc:docChgLst>
-  <pc:docChgLst>
-    <pc:chgData name="Truong Nghiem" userId="vBvvVE8C9ugQCln+04XOl7ubP+936WO3hfIf0AxT0gg=" providerId="None" clId="Web-{691735D0-ED1A-414C-9C4A-C9A78CFB774E}"/>
-    <pc:docChg chg="addSld delSld">
-      <pc:chgData name="Truong Nghiem" userId="vBvvVE8C9ugQCln+04XOl7ubP+936WO3hfIf0AxT0gg=" providerId="None" clId="Web-{691735D0-ED1A-414C-9C4A-C9A78CFB774E}" dt="2026-06-14T18:28:20.179" v="1"/>
-      <pc:docMkLst>
-        <pc:docMk/>
-      </pc:docMkLst>
-      <pc:sldChg chg="new del">
-        <pc:chgData name="Truong Nghiem" userId="vBvvVE8C9ugQCln+04XOl7ubP+936WO3hfIf0AxT0gg=" providerId="None" clId="Web-{691735D0-ED1A-414C-9C4A-C9A78CFB774E}" dt="2026-06-14T18:28:20.179" v="1"/>
-        <pc:sldMkLst>
-          <pc:docMk/>
-          <pc:sldMk cId="1436794479" sldId="1742"/>
-        </pc:sldMkLst>
       </pc:sldChg>
     </pc:docChg>
   </pc:docChgLst>
@@ -1162,7 +1162,7 @@
           <a:p>
             <a:fld id="{2A6FAD2F-3255-4D6B-B7D0-3AD777FD6E16}" type="datetimeFigureOut">
               <a:rPr lang="en-US" smtClean="0"/>
-              <a:t>6/16/26</a:t>
+              <a:t>6/16/2026</a:t>
             </a:fld>
             <a:endParaRPr lang="en-US"/>
           </a:p>
@@ -1484,7 +1484,7 @@
           <a:p>
             <a:fld id="{87CA7F51-485C-4411-96B4-8DBF10CDD334}" type="datetimeFigureOut">
               <a:rPr lang="en-US" smtClean="0"/>
-              <a:t>6/16/26</a:t>
+              <a:t>6/16/2026</a:t>
             </a:fld>
             <a:endParaRPr lang="en-US"/>
           </a:p>
@@ -18806,7 +18806,7 @@
         <p:spPr>
           <a:xfrm>
             <a:off x="2278856" y="3836194"/>
-            <a:ext cx="4572000" cy="830997"/>
+            <a:ext cx="5092950" cy="584775"/>
           </a:xfrm>
           <a:prstGeom prst="rect">
             <a:avLst/>
@@ -23357,6 +23357,55 @@
 </file>
 
 <file path=customXml/item1.xml><?xml version="1.0" encoding="utf-8"?>
+<p:properties xmlns:p="http://schemas.microsoft.com/office/2006/metadata/properties" xmlns:xsi="http://www.w3.org/2001/XMLSchema-instance" xmlns:pc="http://schemas.microsoft.com/office/infopath/2007/PartnerControls">
+  <documentManagement>
+    <SharedWithUsers xmlns="168931df-3f45-4445-be76-105235143e52">
+      <UserInfo>
+        <DisplayName>CLDT Members</DisplayName>
+        <AccountId>7</AccountId>
+        <AccountType/>
+      </UserInfo>
+      <UserInfo>
+        <DisplayName>Leonid Felikson</DisplayName>
+        <AccountId>722</AccountId>
+        <AccountType/>
+      </UserInfo>
+      <UserInfo>
+        <DisplayName>Michelle Nguyen</DisplayName>
+        <AccountId>3986</AccountId>
+        <AccountType/>
+      </UserInfo>
+      <UserInfo>
+        <DisplayName>Natalie Wang</DisplayName>
+        <AccountId>7948</AccountId>
+        <AccountType/>
+      </UserInfo>
+      <UserInfo>
+        <DisplayName>Danielle Lynd</DisplayName>
+        <AccountId>4194</AccountId>
+        <AccountType/>
+      </UserInfo>
+      <UserInfo>
+        <DisplayName>Chongyu Qu</DisplayName>
+        <AccountId>4616</AccountId>
+        <AccountType/>
+      </UserInfo>
+      <UserInfo>
+        <DisplayName>Astrid Santiago</DisplayName>
+        <AccountId>10364</AccountId>
+        <AccountType/>
+      </UserInfo>
+    </SharedWithUsers>
+    <lcf76f155ced4ddcb4097134ff3c332f xmlns="e3b5c32c-df6c-443f-b08b-73d85d62f2b5">
+      <Terms xmlns="http://schemas.microsoft.com/office/infopath/2007/PartnerControls"/>
+    </lcf76f155ced4ddcb4097134ff3c332f>
+    <TaxCatchAll xmlns="168931df-3f45-4445-be76-105235143e52" xsi:nil="true"/>
+    <Tag xmlns="e3b5c32c-df6c-443f-b08b-73d85d62f2b5" xsi:nil="true"/>
+  </documentManagement>
+</p:properties>
+</file>
+
+<file path=customXml/item2.xml><?xml version="1.0" encoding="utf-8"?>
 <ct:contentTypeSchema xmlns:ct="http://schemas.microsoft.com/office/2006/metadata/contentType" xmlns:ma="http://schemas.microsoft.com/office/2006/metadata/properties/metaAttributes" ct:_="" ma:_="" ma:contentTypeName="Document" ma:contentTypeID="0x010100681B81209776AF40B8AAD3C366C78D42" ma:contentTypeVersion="19" ma:contentTypeDescription="Create a new document." ma:contentTypeScope="" ma:versionID="fbb3406e25de908b5a868738d5cb1834">
   <xsd:schema xmlns:xsd="http://www.w3.org/2001/XMLSchema" xmlns:xs="http://www.w3.org/2001/XMLSchema" xmlns:p="http://schemas.microsoft.com/office/2006/metadata/properties" xmlns:ns2="e3b5c32c-df6c-443f-b08b-73d85d62f2b5" xmlns:ns3="168931df-3f45-4445-be76-105235143e52" targetNamespace="http://schemas.microsoft.com/office/2006/metadata/properties" ma:root="true" ma:fieldsID="a51a2fd210533027d0c682d7a8bd76c2" ns2:_="" ns3:_="">
     <xsd:import namespace="e3b5c32c-df6c-443f-b08b-73d85d62f2b5"/>
@@ -23619,55 +23668,6 @@
 </ct:contentTypeSchema>
 </file>
 
-<file path=customXml/item2.xml><?xml version="1.0" encoding="utf-8"?>
-<p:properties xmlns:p="http://schemas.microsoft.com/office/2006/metadata/properties" xmlns:xsi="http://www.w3.org/2001/XMLSchema-instance" xmlns:pc="http://schemas.microsoft.com/office/infopath/2007/PartnerControls">
-  <documentManagement>
-    <SharedWithUsers xmlns="168931df-3f45-4445-be76-105235143e52">
-      <UserInfo>
-        <DisplayName>CLDT Members</DisplayName>
-        <AccountId>7</AccountId>
-        <AccountType/>
-      </UserInfo>
-      <UserInfo>
-        <DisplayName>Leonid Felikson</DisplayName>
-        <AccountId>722</AccountId>
-        <AccountType/>
-      </UserInfo>
-      <UserInfo>
-        <DisplayName>Michelle Nguyen</DisplayName>
-        <AccountId>3986</AccountId>
-        <AccountType/>
-      </UserInfo>
-      <UserInfo>
-        <DisplayName>Natalie Wang</DisplayName>
-        <AccountId>7948</AccountId>
-        <AccountType/>
-      </UserInfo>
-      <UserInfo>
-        <DisplayName>Danielle Lynd</DisplayName>
-        <AccountId>4194</AccountId>
-        <AccountType/>
-      </UserInfo>
-      <UserInfo>
-        <DisplayName>Chongyu Qu</DisplayName>
-        <AccountId>4616</AccountId>
-        <AccountType/>
-      </UserInfo>
-      <UserInfo>
-        <DisplayName>Astrid Santiago</DisplayName>
-        <AccountId>10364</AccountId>
-        <AccountType/>
-      </UserInfo>
-    </SharedWithUsers>
-    <lcf76f155ced4ddcb4097134ff3c332f xmlns="e3b5c32c-df6c-443f-b08b-73d85d62f2b5">
-      <Terms xmlns="http://schemas.microsoft.com/office/infopath/2007/PartnerControls"/>
-    </lcf76f155ced4ddcb4097134ff3c332f>
-    <TaxCatchAll xmlns="168931df-3f45-4445-be76-105235143e52" xsi:nil="true"/>
-    <Tag xmlns="e3b5c32c-df6c-443f-b08b-73d85d62f2b5" xsi:nil="true"/>
-  </documentManagement>
-</p:properties>
-</file>
-
 <file path=customXml/item3.xml><?xml version="1.0" encoding="utf-8"?>
 <?mso-contentType ?>
 <FormTemplates xmlns="http://schemas.microsoft.com/sharepoint/v3/contenttype/forms">
@@ -23678,6 +23678,23 @@
 </file>
 
 <file path=customXml/itemProps1.xml><?xml version="1.0" encoding="utf-8"?>
+<ds:datastoreItem xmlns:ds="http://schemas.openxmlformats.org/officeDocument/2006/customXml" ds:itemID="{F8A04465-0014-4D33-ABA2-D6924F11FEE0}">
+  <ds:schemaRefs>
+    <ds:schemaRef ds:uri="http://purl.org/dc/elements/1.1/"/>
+    <ds:schemaRef ds:uri="http://schemas.microsoft.com/office/2006/documentManagement/types"/>
+    <ds:schemaRef ds:uri="168931df-3f45-4445-be76-105235143e52"/>
+    <ds:schemaRef ds:uri="http://schemas.openxmlformats.org/package/2006/metadata/core-properties"/>
+    <ds:schemaRef ds:uri="http://purl.org/dc/dcmitype/"/>
+    <ds:schemaRef ds:uri="http://purl.org/dc/terms/"/>
+    <ds:schemaRef ds:uri="http://schemas.microsoft.com/office/infopath/2007/PartnerControls"/>
+    <ds:schemaRef ds:uri="e3b5c32c-df6c-443f-b08b-73d85d62f2b5"/>
+    <ds:schemaRef ds:uri="http://schemas.microsoft.com/office/2006/metadata/properties"/>
+    <ds:schemaRef ds:uri="http://www.w3.org/XML/1998/namespace"/>
+  </ds:schemaRefs>
+</ds:datastoreItem>
+</file>
+
+<file path=customXml/itemProps2.xml><?xml version="1.0" encoding="utf-8"?>
 <ds:datastoreItem xmlns:ds="http://schemas.openxmlformats.org/officeDocument/2006/customXml" ds:itemID="{BD0C1DF4-4B0B-4532-AD5E-FC8A9D25A061}">
   <ds:schemaRefs>
     <ds:schemaRef ds:uri="http://schemas.microsoft.com/office/2006/metadata/contentType"/>
@@ -23696,23 +23713,6 @@
 </ds:datastoreItem>
 </file>
 
-<file path=customXml/itemProps2.xml><?xml version="1.0" encoding="utf-8"?>
-<ds:datastoreItem xmlns:ds="http://schemas.openxmlformats.org/officeDocument/2006/customXml" ds:itemID="{F8A04465-0014-4D33-ABA2-D6924F11FEE0}">
-  <ds:schemaRefs>
-    <ds:schemaRef ds:uri="http://purl.org/dc/elements/1.1/"/>
-    <ds:schemaRef ds:uri="http://schemas.microsoft.com/office/2006/documentManagement/types"/>
-    <ds:schemaRef ds:uri="168931df-3f45-4445-be76-105235143e52"/>
-    <ds:schemaRef ds:uri="http://schemas.openxmlformats.org/package/2006/metadata/core-properties"/>
-    <ds:schemaRef ds:uri="http://purl.org/dc/dcmitype/"/>
-    <ds:schemaRef ds:uri="http://purl.org/dc/terms/"/>
-    <ds:schemaRef ds:uri="http://schemas.microsoft.com/office/infopath/2007/PartnerControls"/>
-    <ds:schemaRef ds:uri="e3b5c32c-df6c-443f-b08b-73d85d62f2b5"/>
-    <ds:schemaRef ds:uri="http://schemas.microsoft.com/office/2006/metadata/properties"/>
-    <ds:schemaRef ds:uri="http://www.w3.org/XML/1998/namespace"/>
-  </ds:schemaRefs>
-</ds:datastoreItem>
-</file>
-
 <file path=customXml/itemProps3.xml><?xml version="1.0" encoding="utf-8"?>
 <ds:datastoreItem xmlns:ds="http://schemas.openxmlformats.org/officeDocument/2006/customXml" ds:itemID="{0F8F7E09-D485-4407-984B-97D2EA2C8D55}">
   <ds:schemaRefs>

--- a/slides/L2O.pptx
+++ b/slides/L2O.pptx
@@ -1162,7 +1162,7 @@
           <a:p>
             <a:fld id="{2A6FAD2F-3255-4D6B-B7D0-3AD777FD6E16}" type="datetimeFigureOut">
               <a:rPr lang="en-US" smtClean="0"/>
-              <a:t>6/16/2026</a:t>
+              <a:t>6/16/26</a:t>
             </a:fld>
             <a:endParaRPr lang="en-US"/>
           </a:p>
@@ -1484,7 +1484,7 @@
           <a:p>
             <a:fld id="{87CA7F51-485C-4411-96B4-8DBF10CDD334}" type="datetimeFigureOut">
               <a:rPr lang="en-US" smtClean="0"/>
-              <a:t>6/16/2026</a:t>
+              <a:t>6/16/26</a:t>
             </a:fld>
             <a:endParaRPr lang="en-US"/>
           </a:p>
@@ -8504,6 +8504,28 @@
           <a:p>
             <a:pPr marL="685165" lvl="1" indent="-227965"/>
             <a:r>
+              <a:rPr lang="en-US" sz="1400" dirty="0">
+                <a:latin typeface="Arial"/>
+                <a:cs typeface="Arial"/>
+              </a:rPr>
+              <a:t>More L2O examples: </a:t>
+            </a:r>
+            <a:r>
+              <a:rPr lang="en-US" sz="1400" dirty="0">
+                <a:latin typeface="Arial"/>
+                <a:cs typeface="Arial"/>
+                <a:hlinkClick r:id="rId2"/>
+              </a:rPr>
+              <a:t>https://github.com/pnnl/neuromancer</a:t>
+            </a:r>
+            <a:endParaRPr lang="en-US" sz="1400" dirty="0">
+              <a:latin typeface="Arial"/>
+              <a:cs typeface="Arial"/>
+            </a:endParaRPr>
+          </a:p>
+          <a:p>
+            <a:pPr marL="685165" lvl="1" indent="-227965"/>
+            <a:r>
               <a:rPr lang="en-US" sz="1400" dirty="0" err="1">
                 <a:latin typeface="Arial"/>
                 <a:cs typeface="Arial"/>
@@ -8521,31 +8543,16 @@
               <a:rPr lang="en-US" sz="1400" dirty="0">
                 <a:latin typeface="Arial"/>
                 <a:cs typeface="Arial"/>
-                <a:hlinkClick r:id="rId2"/>
+                <a:hlinkClick r:id="rId3"/>
               </a:rPr>
               <a:t>https://pimlxplore.nxtlab.org/</a:t>
-            </a:r>
-            <a:endParaRPr lang="en-US" sz="1400" dirty="0">
-              <a:latin typeface="Arial"/>
-              <a:cs typeface="Arial"/>
-            </a:endParaRPr>
-          </a:p>
-          <a:p>
-            <a:pPr marL="685165" lvl="1" indent="-227965"/>
-            <a:r>
-              <a:rPr lang="en-US" sz="1400" dirty="0">
-                <a:latin typeface="Arial"/>
-                <a:cs typeface="Arial"/>
-                <a:hlinkClick r:id="rId3"/>
-              </a:rPr>
-              <a:t>https://nxtlab.org/</a:t>
             </a:r>
             <a:r>
               <a:rPr lang="en-US" sz="1400" dirty="0">
                 <a:latin typeface="Arial"/>
                 <a:cs typeface="Arial"/>
               </a:rPr>
-              <a:t> </a:t>
+              <a:t>  </a:t>
             </a:r>
           </a:p>
           <a:p>
@@ -8575,6 +8582,31 @@
               </a:rPr>
               <a:t>nxt@ucf.edu</a:t>
             </a:r>
+            <a:r>
+              <a:rPr lang="en-US" sz="1600" dirty="0">
+                <a:ea typeface="Tahoma"/>
+              </a:rPr>
+              <a:t> </a:t>
+            </a:r>
+            <a:br>
+              <a:rPr lang="en-US" sz="1600" dirty="0">
+                <a:ea typeface="Tahoma"/>
+              </a:rPr>
+            </a:br>
+            <a:r>
+              <a:rPr lang="en-US" sz="1600" dirty="0">
+                <a:ea typeface="Tahoma"/>
+              </a:rPr>
+              <a:t>		     </a:t>
+            </a:r>
+            <a:r>
+              <a:rPr lang="en-US" sz="1600" dirty="0">
+                <a:latin typeface="Arial"/>
+                <a:cs typeface="Arial"/>
+                <a:hlinkClick r:id="rId5"/>
+              </a:rPr>
+              <a:t>https://nxtlab.org/</a:t>
+            </a:r>
             <a:endParaRPr lang="en-US" sz="1600" dirty="0">
               <a:ea typeface="Tahoma"/>
             </a:endParaRPr>
@@ -8596,7 +8628,7 @@
           <p:nvPr/>
         </p:nvPicPr>
         <p:blipFill rotWithShape="1">
-          <a:blip r:embed="rId5">
+          <a:blip r:embed="rId6">
             <a:extLst>
               <a:ext uri="{28A0092B-C50C-407E-A947-70E740481C1C}">
                 <a14:useLocalDpi xmlns:a14="http://schemas.microsoft.com/office/drawing/2010/main" val="0"/>
@@ -8608,8 +8640,8 @@
         </p:blipFill>
         <p:spPr>
           <a:xfrm>
-            <a:off x="1495148" y="3586512"/>
-            <a:ext cx="6139958" cy="1389182"/>
+            <a:off x="1723545" y="3638187"/>
+            <a:ext cx="5683164" cy="1285832"/>
           </a:xfrm>
           <a:prstGeom prst="rect">
             <a:avLst/>
@@ -18806,7 +18838,7 @@
         <p:spPr>
           <a:xfrm>
             <a:off x="2278856" y="3836194"/>
-            <a:ext cx="5092950" cy="584775"/>
+            <a:ext cx="4999022" cy="584775"/>
           </a:xfrm>
           <a:prstGeom prst="rect">
             <a:avLst/>
@@ -18832,7 +18864,7 @@
               <a:rPr lang="en-US" sz="1600" b="1" dirty="0"/>
               <a:t> </a:t>
             </a:r>
-            <a:endParaRPr lang="en-US" sz="1600" b="1">
+            <a:endParaRPr lang="en-US" sz="1600" b="1" dirty="0">
               <a:ea typeface="Tahoma"/>
               <a:cs typeface="Tahoma"/>
             </a:endParaRPr>
